--- a/CEC_Data_Model_and_Process_Flow_v2.pptx
+++ b/CEC_Data_Model_and_Process_Flow_v2.pptx
@@ -117,7 +117,7 @@
 <file path=ppt/revisionInfo.xml><?xml version="1.0" encoding="utf-8"?>
 <p1510:revInfo xmlns:a="http://schemas.openxmlformats.org/drawingml/2006/main" xmlns:r="http://schemas.openxmlformats.org/officeDocument/2006/relationships" xmlns:p1510="http://schemas.microsoft.com/office/powerpoint/2015/10/main">
   <p1510:revLst>
-    <p1510:client id="{D3639F06-7BB5-4F27-9D87-D5A17088DF62}" v="1" dt="2026-10-25T13:26:29.198"/>
+    <p1510:client id="{D3639F06-7BB5-4F27-9D87-D5A17088DF62}" v="12" dt="2026-10-28T06:04:05.593"/>
   </p1510:revLst>
 </p1510:revInfo>
 </file>
@@ -126,17 +126,41 @@
 <pc:chgInfo xmlns:a="http://schemas.openxmlformats.org/drawingml/2006/main" xmlns:r="http://schemas.openxmlformats.org/officeDocument/2006/relationships" xmlns:ac="http://schemas.microsoft.com/office/drawing/2013/main/command" xmlns:pc="http://schemas.microsoft.com/office/powerpoint/2013/main/command">
   <pc:docChgLst>
     <pc:chgData name="Srinivas" userId="0dfdf577-abd2-4267-93fe-1b178774e272" providerId="ADAL" clId="{26E41FBD-A856-477A-B280-770F18103933}"/>
-    <pc:docChg chg="undo custSel modSld">
-      <pc:chgData name="Srinivas" userId="0dfdf577-abd2-4267-93fe-1b178774e272" providerId="ADAL" clId="{26E41FBD-A856-477A-B280-770F18103933}" dt="2026-10-26T02:42:54.759" v="268" actId="20577"/>
+    <pc:docChg chg="undo custSel addSld delSld modSld">
+      <pc:chgData name="Srinivas" userId="0dfdf577-abd2-4267-93fe-1b178774e272" providerId="ADAL" clId="{26E41FBD-A856-477A-B280-770F18103933}" dt="2026-10-28T06:18:08.684" v="572" actId="20577"/>
       <pc:docMkLst>
         <pc:docMk/>
       </pc:docMkLst>
       <pc:sldChg chg="modSp mod">
-        <pc:chgData name="Srinivas" userId="0dfdf577-abd2-4267-93fe-1b178774e272" providerId="ADAL" clId="{26E41FBD-A856-477A-B280-770F18103933}" dt="2026-10-25T13:29:08.821" v="194" actId="20577"/>
+        <pc:chgData name="Srinivas" userId="0dfdf577-abd2-4267-93fe-1b178774e272" providerId="ADAL" clId="{26E41FBD-A856-477A-B280-770F18103933}" dt="2026-10-28T06:18:08.684" v="572" actId="20577"/>
         <pc:sldMkLst>
           <pc:docMk/>
           <pc:sldMk cId="0" sldId="256"/>
         </pc:sldMkLst>
+        <pc:spChg chg="mod">
+          <ac:chgData name="Srinivas" userId="0dfdf577-abd2-4267-93fe-1b178774e272" providerId="ADAL" clId="{26E41FBD-A856-477A-B280-770F18103933}" dt="2026-10-28T05:52:30.648" v="269" actId="6549"/>
+          <ac:spMkLst>
+            <pc:docMk/>
+            <pc:sldMk cId="0" sldId="256"/>
+            <ac:spMk id="8" creationId="{00000000-0000-0000-0000-000000000000}"/>
+          </ac:spMkLst>
+        </pc:spChg>
+        <pc:spChg chg="mod">
+          <ac:chgData name="Srinivas" userId="0dfdf577-abd2-4267-93fe-1b178774e272" providerId="ADAL" clId="{26E41FBD-A856-477A-B280-770F18103933}" dt="2026-10-28T06:18:03.516" v="560" actId="20577"/>
+          <ac:spMkLst>
+            <pc:docMk/>
+            <pc:sldMk cId="0" sldId="256"/>
+            <ac:spMk id="16" creationId="{00000000-0000-0000-0000-000000000000}"/>
+          </ac:spMkLst>
+        </pc:spChg>
+        <pc:spChg chg="mod">
+          <ac:chgData name="Srinivas" userId="0dfdf577-abd2-4267-93fe-1b178774e272" providerId="ADAL" clId="{26E41FBD-A856-477A-B280-770F18103933}" dt="2026-10-28T05:52:41.835" v="277" actId="20577"/>
+          <ac:spMkLst>
+            <pc:docMk/>
+            <pc:sldMk cId="0" sldId="256"/>
+            <ac:spMk id="24" creationId="{00000000-0000-0000-0000-000000000000}"/>
+          </ac:spMkLst>
+        </pc:spChg>
         <pc:spChg chg="mod">
           <ac:chgData name="Srinivas" userId="0dfdf577-abd2-4267-93fe-1b178774e272" providerId="ADAL" clId="{26E41FBD-A856-477A-B280-770F18103933}" dt="2026-10-25T13:28:46.340" v="153" actId="6549"/>
           <ac:spMkLst>
@@ -153,13 +177,452 @@
             <ac:spMk id="28" creationId="{00000000-0000-0000-0000-000000000000}"/>
           </ac:spMkLst>
         </pc:spChg>
+        <pc:spChg chg="mod">
+          <ac:chgData name="Srinivas" userId="0dfdf577-abd2-4267-93fe-1b178774e272" providerId="ADAL" clId="{26E41FBD-A856-477A-B280-770F18103933}" dt="2026-10-28T06:18:08.684" v="572" actId="20577"/>
+          <ac:spMkLst>
+            <pc:docMk/>
+            <pc:sldMk cId="0" sldId="256"/>
+            <ac:spMk id="32" creationId="{00000000-0000-0000-0000-000000000000}"/>
+          </ac:spMkLst>
+        </pc:spChg>
       </pc:sldChg>
-      <pc:sldChg chg="delSp modSp mod">
-        <pc:chgData name="Srinivas" userId="0dfdf577-abd2-4267-93fe-1b178774e272" providerId="ADAL" clId="{26E41FBD-A856-477A-B280-770F18103933}" dt="2026-10-26T02:42:54.759" v="268" actId="20577"/>
+      <pc:sldChg chg="addSp delSp modSp mod">
+        <pc:chgData name="Srinivas" userId="0dfdf577-abd2-4267-93fe-1b178774e272" providerId="ADAL" clId="{26E41FBD-A856-477A-B280-770F18103933}" dt="2026-10-28T06:05:33.007" v="458" actId="20577"/>
+        <pc:sldMkLst>
+          <pc:docMk/>
+          <pc:sldMk cId="0" sldId="257"/>
+        </pc:sldMkLst>
+        <pc:spChg chg="mod">
+          <ac:chgData name="Srinivas" userId="0dfdf577-abd2-4267-93fe-1b178774e272" providerId="ADAL" clId="{26E41FBD-A856-477A-B280-770F18103933}" dt="2026-10-28T06:02:43.027" v="429" actId="1076"/>
+          <ac:spMkLst>
+            <pc:docMk/>
+            <pc:sldMk cId="0" sldId="257"/>
+            <ac:spMk id="4" creationId="{00000000-0000-0000-0000-000000000000}"/>
+          </ac:spMkLst>
+        </pc:spChg>
+        <pc:spChg chg="mod">
+          <ac:chgData name="Srinivas" userId="0dfdf577-abd2-4267-93fe-1b178774e272" providerId="ADAL" clId="{26E41FBD-A856-477A-B280-770F18103933}" dt="2026-10-28T06:00:27.822" v="402" actId="14100"/>
+          <ac:spMkLst>
+            <pc:docMk/>
+            <pc:sldMk cId="0" sldId="257"/>
+            <ac:spMk id="10" creationId="{00000000-0000-0000-0000-000000000000}"/>
+          </ac:spMkLst>
+        </pc:spChg>
+        <pc:spChg chg="mod ord">
+          <ac:chgData name="Srinivas" userId="0dfdf577-abd2-4267-93fe-1b178774e272" providerId="ADAL" clId="{26E41FBD-A856-477A-B280-770F18103933}" dt="2026-10-28T05:54:21.414" v="300" actId="1076"/>
+          <ac:spMkLst>
+            <pc:docMk/>
+            <pc:sldMk cId="0" sldId="257"/>
+            <ac:spMk id="11" creationId="{00000000-0000-0000-0000-000000000000}"/>
+          </ac:spMkLst>
+        </pc:spChg>
+        <pc:spChg chg="mod ord">
+          <ac:chgData name="Srinivas" userId="0dfdf577-abd2-4267-93fe-1b178774e272" providerId="ADAL" clId="{26E41FBD-A856-477A-B280-770F18103933}" dt="2026-10-28T05:54:21.414" v="300" actId="1076"/>
+          <ac:spMkLst>
+            <pc:docMk/>
+            <pc:sldMk cId="0" sldId="257"/>
+            <ac:spMk id="12" creationId="{00000000-0000-0000-0000-000000000000}"/>
+          </ac:spMkLst>
+        </pc:spChg>
+        <pc:spChg chg="mod">
+          <ac:chgData name="Srinivas" userId="0dfdf577-abd2-4267-93fe-1b178774e272" providerId="ADAL" clId="{26E41FBD-A856-477A-B280-770F18103933}" dt="2026-10-28T06:00:21.195" v="401" actId="1076"/>
+          <ac:spMkLst>
+            <pc:docMk/>
+            <pc:sldMk cId="0" sldId="257"/>
+            <ac:spMk id="13" creationId="{00000000-0000-0000-0000-000000000000}"/>
+          </ac:spMkLst>
+        </pc:spChg>
+        <pc:spChg chg="mod">
+          <ac:chgData name="Srinivas" userId="0dfdf577-abd2-4267-93fe-1b178774e272" providerId="ADAL" clId="{26E41FBD-A856-477A-B280-770F18103933}" dt="2026-10-28T06:00:33.442" v="403" actId="14100"/>
+          <ac:spMkLst>
+            <pc:docMk/>
+            <pc:sldMk cId="0" sldId="257"/>
+            <ac:spMk id="14" creationId="{00000000-0000-0000-0000-000000000000}"/>
+          </ac:spMkLst>
+        </pc:spChg>
+        <pc:spChg chg="mod">
+          <ac:chgData name="Srinivas" userId="0dfdf577-abd2-4267-93fe-1b178774e272" providerId="ADAL" clId="{26E41FBD-A856-477A-B280-770F18103933}" dt="2026-10-28T06:00:33.442" v="403" actId="14100"/>
+          <ac:spMkLst>
+            <pc:docMk/>
+            <pc:sldMk cId="0" sldId="257"/>
+            <ac:spMk id="15" creationId="{00000000-0000-0000-0000-000000000000}"/>
+          </ac:spMkLst>
+        </pc:spChg>
+        <pc:spChg chg="mod">
+          <ac:chgData name="Srinivas" userId="0dfdf577-abd2-4267-93fe-1b178774e272" providerId="ADAL" clId="{26E41FBD-A856-477A-B280-770F18103933}" dt="2026-10-28T05:57:17.163" v="363" actId="164"/>
+          <ac:spMkLst>
+            <pc:docMk/>
+            <pc:sldMk cId="0" sldId="257"/>
+            <ac:spMk id="28" creationId="{00000000-0000-0000-0000-000000000000}"/>
+          </ac:spMkLst>
+        </pc:spChg>
+        <pc:spChg chg="mod ord topLvl">
+          <ac:chgData name="Srinivas" userId="0dfdf577-abd2-4267-93fe-1b178774e272" providerId="ADAL" clId="{26E41FBD-A856-477A-B280-770F18103933}" dt="2026-10-28T06:04:12.256" v="441" actId="1076"/>
+          <ac:spMkLst>
+            <pc:docMk/>
+            <pc:sldMk cId="0" sldId="257"/>
+            <ac:spMk id="29" creationId="{00000000-0000-0000-0000-000000000000}"/>
+          </ac:spMkLst>
+        </pc:spChg>
+        <pc:spChg chg="mod ord topLvl">
+          <ac:chgData name="Srinivas" userId="0dfdf577-abd2-4267-93fe-1b178774e272" providerId="ADAL" clId="{26E41FBD-A856-477A-B280-770F18103933}" dt="2026-10-28T06:04:17.422" v="442" actId="14100"/>
+          <ac:spMkLst>
+            <pc:docMk/>
+            <pc:sldMk cId="0" sldId="257"/>
+            <ac:spMk id="30" creationId="{00000000-0000-0000-0000-000000000000}"/>
+          </ac:spMkLst>
+        </pc:spChg>
+        <pc:spChg chg="mod">
+          <ac:chgData name="Srinivas" userId="0dfdf577-abd2-4267-93fe-1b178774e272" providerId="ADAL" clId="{26E41FBD-A856-477A-B280-770F18103933}" dt="2026-10-28T05:57:17.163" v="363" actId="164"/>
+          <ac:spMkLst>
+            <pc:docMk/>
+            <pc:sldMk cId="0" sldId="257"/>
+            <ac:spMk id="31" creationId="{00000000-0000-0000-0000-000000000000}"/>
+          </ac:spMkLst>
+        </pc:spChg>
+        <pc:spChg chg="mod">
+          <ac:chgData name="Srinivas" userId="0dfdf577-abd2-4267-93fe-1b178774e272" providerId="ADAL" clId="{26E41FBD-A856-477A-B280-770F18103933}" dt="2026-10-28T05:58:14.402" v="375" actId="164"/>
+          <ac:spMkLst>
+            <pc:docMk/>
+            <pc:sldMk cId="0" sldId="257"/>
+            <ac:spMk id="32" creationId="{00000000-0000-0000-0000-000000000000}"/>
+          </ac:spMkLst>
+        </pc:spChg>
+        <pc:spChg chg="mod">
+          <ac:chgData name="Srinivas" userId="0dfdf577-abd2-4267-93fe-1b178774e272" providerId="ADAL" clId="{26E41FBD-A856-477A-B280-770F18103933}" dt="2026-10-28T05:58:14.402" v="375" actId="164"/>
+          <ac:spMkLst>
+            <pc:docMk/>
+            <pc:sldMk cId="0" sldId="257"/>
+            <ac:spMk id="33" creationId="{00000000-0000-0000-0000-000000000000}"/>
+          </ac:spMkLst>
+        </pc:spChg>
+        <pc:spChg chg="del mod">
+          <ac:chgData name="Srinivas" userId="0dfdf577-abd2-4267-93fe-1b178774e272" providerId="ADAL" clId="{26E41FBD-A856-477A-B280-770F18103933}" dt="2026-10-28T06:00:58.419" v="408" actId="478"/>
+          <ac:spMkLst>
+            <pc:docMk/>
+            <pc:sldMk cId="0" sldId="257"/>
+            <ac:spMk id="36" creationId="{00000000-0000-0000-0000-000000000000}"/>
+          </ac:spMkLst>
+        </pc:spChg>
+        <pc:spChg chg="mod">
+          <ac:chgData name="Srinivas" userId="0dfdf577-abd2-4267-93fe-1b178774e272" providerId="ADAL" clId="{26E41FBD-A856-477A-B280-770F18103933}" dt="2026-10-28T05:57:57.649" v="372" actId="14100"/>
+          <ac:spMkLst>
+            <pc:docMk/>
+            <pc:sldMk cId="0" sldId="257"/>
+            <ac:spMk id="37" creationId="{00000000-0000-0000-0000-000000000000}"/>
+          </ac:spMkLst>
+        </pc:spChg>
+        <pc:spChg chg="mod topLvl">
+          <ac:chgData name="Srinivas" userId="0dfdf577-abd2-4267-93fe-1b178774e272" providerId="ADAL" clId="{26E41FBD-A856-477A-B280-770F18103933}" dt="2026-10-28T05:58:44.904" v="381" actId="164"/>
+          <ac:spMkLst>
+            <pc:docMk/>
+            <pc:sldMk cId="0" sldId="257"/>
+            <ac:spMk id="38" creationId="{00000000-0000-0000-0000-000000000000}"/>
+          </ac:spMkLst>
+        </pc:spChg>
+        <pc:spChg chg="mod topLvl">
+          <ac:chgData name="Srinivas" userId="0dfdf577-abd2-4267-93fe-1b178774e272" providerId="ADAL" clId="{26E41FBD-A856-477A-B280-770F18103933}" dt="2026-10-28T05:58:44.904" v="381" actId="164"/>
+          <ac:spMkLst>
+            <pc:docMk/>
+            <pc:sldMk cId="0" sldId="257"/>
+            <ac:spMk id="39" creationId="{00000000-0000-0000-0000-000000000000}"/>
+          </ac:spMkLst>
+        </pc:spChg>
+        <pc:spChg chg="mod topLvl">
+          <ac:chgData name="Srinivas" userId="0dfdf577-abd2-4267-93fe-1b178774e272" providerId="ADAL" clId="{26E41FBD-A856-477A-B280-770F18103933}" dt="2026-10-28T05:58:44.904" v="381" actId="164"/>
+          <ac:spMkLst>
+            <pc:docMk/>
+            <pc:sldMk cId="0" sldId="257"/>
+            <ac:spMk id="40" creationId="{00000000-0000-0000-0000-000000000000}"/>
+          </ac:spMkLst>
+        </pc:spChg>
+        <pc:spChg chg="mod topLvl">
+          <ac:chgData name="Srinivas" userId="0dfdf577-abd2-4267-93fe-1b178774e272" providerId="ADAL" clId="{26E41FBD-A856-477A-B280-770F18103933}" dt="2026-10-28T05:58:44.904" v="381" actId="164"/>
+          <ac:spMkLst>
+            <pc:docMk/>
+            <pc:sldMk cId="0" sldId="257"/>
+            <ac:spMk id="41" creationId="{00000000-0000-0000-0000-000000000000}"/>
+          </ac:spMkLst>
+        </pc:spChg>
+        <pc:spChg chg="mod">
+          <ac:chgData name="Srinivas" userId="0dfdf577-abd2-4267-93fe-1b178774e272" providerId="ADAL" clId="{26E41FBD-A856-477A-B280-770F18103933}" dt="2026-10-28T05:56:39.099" v="354" actId="164"/>
+          <ac:spMkLst>
+            <pc:docMk/>
+            <pc:sldMk cId="0" sldId="257"/>
+            <ac:spMk id="42" creationId="{00000000-0000-0000-0000-000000000000}"/>
+          </ac:spMkLst>
+        </pc:spChg>
+        <pc:spChg chg="mod">
+          <ac:chgData name="Srinivas" userId="0dfdf577-abd2-4267-93fe-1b178774e272" providerId="ADAL" clId="{26E41FBD-A856-477A-B280-770F18103933}" dt="2026-10-28T05:56:39.099" v="354" actId="164"/>
+          <ac:spMkLst>
+            <pc:docMk/>
+            <pc:sldMk cId="0" sldId="257"/>
+            <ac:spMk id="43" creationId="{00000000-0000-0000-0000-000000000000}"/>
+          </ac:spMkLst>
+        </pc:spChg>
+        <pc:spChg chg="mod">
+          <ac:chgData name="Srinivas" userId="0dfdf577-abd2-4267-93fe-1b178774e272" providerId="ADAL" clId="{26E41FBD-A856-477A-B280-770F18103933}" dt="2026-10-28T05:56:52.402" v="356" actId="164"/>
+          <ac:spMkLst>
+            <pc:docMk/>
+            <pc:sldMk cId="0" sldId="257"/>
+            <ac:spMk id="44" creationId="{00000000-0000-0000-0000-000000000000}"/>
+          </ac:spMkLst>
+        </pc:spChg>
+        <pc:spChg chg="mod">
+          <ac:chgData name="Srinivas" userId="0dfdf577-abd2-4267-93fe-1b178774e272" providerId="ADAL" clId="{26E41FBD-A856-477A-B280-770F18103933}" dt="2026-10-28T05:56:52.402" v="356" actId="164"/>
+          <ac:spMkLst>
+            <pc:docMk/>
+            <pc:sldMk cId="0" sldId="257"/>
+            <ac:spMk id="45" creationId="{00000000-0000-0000-0000-000000000000}"/>
+          </ac:spMkLst>
+        </pc:spChg>
+        <pc:spChg chg="mod topLvl">
+          <ac:chgData name="Srinivas" userId="0dfdf577-abd2-4267-93fe-1b178774e272" providerId="ADAL" clId="{26E41FBD-A856-477A-B280-770F18103933}" dt="2026-10-28T05:58:44.904" v="381" actId="164"/>
+          <ac:spMkLst>
+            <pc:docMk/>
+            <pc:sldMk cId="0" sldId="257"/>
+            <ac:spMk id="46" creationId="{00000000-0000-0000-0000-000000000000}"/>
+          </ac:spMkLst>
+        </pc:spChg>
+        <pc:spChg chg="mod topLvl">
+          <ac:chgData name="Srinivas" userId="0dfdf577-abd2-4267-93fe-1b178774e272" providerId="ADAL" clId="{26E41FBD-A856-477A-B280-770F18103933}" dt="2026-10-28T05:58:44.904" v="381" actId="164"/>
+          <ac:spMkLst>
+            <pc:docMk/>
+            <pc:sldMk cId="0" sldId="257"/>
+            <ac:spMk id="47" creationId="{00000000-0000-0000-0000-000000000000}"/>
+          </ac:spMkLst>
+        </pc:spChg>
+        <pc:spChg chg="mod">
+          <ac:chgData name="Srinivas" userId="0dfdf577-abd2-4267-93fe-1b178774e272" providerId="ADAL" clId="{26E41FBD-A856-477A-B280-770F18103933}" dt="2026-10-28T05:58:20.127" v="377" actId="14100"/>
+          <ac:spMkLst>
+            <pc:docMk/>
+            <pc:sldMk cId="0" sldId="257"/>
+            <ac:spMk id="48" creationId="{00000000-0000-0000-0000-000000000000}"/>
+          </ac:spMkLst>
+        </pc:spChg>
+        <pc:spChg chg="mod">
+          <ac:chgData name="Srinivas" userId="0dfdf577-abd2-4267-93fe-1b178774e272" providerId="ADAL" clId="{26E41FBD-A856-477A-B280-770F18103933}" dt="2026-10-28T05:58:17.509" v="376" actId="14100"/>
+          <ac:spMkLst>
+            <pc:docMk/>
+            <pc:sldMk cId="0" sldId="257"/>
+            <ac:spMk id="49" creationId="{00000000-0000-0000-0000-000000000000}"/>
+          </ac:spMkLst>
+        </pc:spChg>
+        <pc:spChg chg="mod">
+          <ac:chgData name="Srinivas" userId="0dfdf577-abd2-4267-93fe-1b178774e272" providerId="ADAL" clId="{26E41FBD-A856-477A-B280-770F18103933}" dt="2026-10-28T06:00:43.477" v="404" actId="1076"/>
+          <ac:spMkLst>
+            <pc:docMk/>
+            <pc:sldMk cId="0" sldId="257"/>
+            <ac:spMk id="50" creationId="{00000000-0000-0000-0000-000000000000}"/>
+          </ac:spMkLst>
+        </pc:spChg>
+        <pc:spChg chg="mod">
+          <ac:chgData name="Srinivas" userId="0dfdf577-abd2-4267-93fe-1b178774e272" providerId="ADAL" clId="{26E41FBD-A856-477A-B280-770F18103933}" dt="2026-10-28T05:58:55.932" v="384" actId="1076"/>
+          <ac:spMkLst>
+            <pc:docMk/>
+            <pc:sldMk cId="0" sldId="257"/>
+            <ac:spMk id="51" creationId="{00000000-0000-0000-0000-000000000000}"/>
+          </ac:spMkLst>
+        </pc:spChg>
+        <pc:spChg chg="mod">
+          <ac:chgData name="Srinivas" userId="0dfdf577-abd2-4267-93fe-1b178774e272" providerId="ADAL" clId="{26E41FBD-A856-477A-B280-770F18103933}" dt="2026-10-28T06:02:51.135" v="433" actId="1076"/>
+          <ac:spMkLst>
+            <pc:docMk/>
+            <pc:sldMk cId="0" sldId="257"/>
+            <ac:spMk id="52" creationId="{00000000-0000-0000-0000-000000000000}"/>
+          </ac:spMkLst>
+        </pc:spChg>
+        <pc:spChg chg="add mod">
+          <ac:chgData name="Srinivas" userId="0dfdf577-abd2-4267-93fe-1b178774e272" providerId="ADAL" clId="{26E41FBD-A856-477A-B280-770F18103933}" dt="2026-10-28T05:53:39.068" v="288" actId="571"/>
+          <ac:spMkLst>
+            <pc:docMk/>
+            <pc:sldMk cId="0" sldId="257"/>
+            <ac:spMk id="54" creationId="{DAAFDE11-73D1-4832-ECB2-6FDCD0DC2E67}"/>
+          </ac:spMkLst>
+        </pc:spChg>
+        <pc:spChg chg="add mod">
+          <ac:chgData name="Srinivas" userId="0dfdf577-abd2-4267-93fe-1b178774e272" providerId="ADAL" clId="{26E41FBD-A856-477A-B280-770F18103933}" dt="2026-10-28T05:54:41.399" v="303" actId="1076"/>
+          <ac:spMkLst>
+            <pc:docMk/>
+            <pc:sldMk cId="0" sldId="257"/>
+            <ac:spMk id="56" creationId="{A2659E37-5DD5-15CC-1821-E0D131BF46D8}"/>
+          </ac:spMkLst>
+        </pc:spChg>
+        <pc:spChg chg="add mod">
+          <ac:chgData name="Srinivas" userId="0dfdf577-abd2-4267-93fe-1b178774e272" providerId="ADAL" clId="{26E41FBD-A856-477A-B280-770F18103933}" dt="2026-10-28T05:54:52.939" v="334" actId="20577"/>
+          <ac:spMkLst>
+            <pc:docMk/>
+            <pc:sldMk cId="0" sldId="257"/>
+            <ac:spMk id="58" creationId="{CBCE4783-97BD-DD83-BADD-DADCD2CA2318}"/>
+          </ac:spMkLst>
+        </pc:spChg>
+        <pc:spChg chg="add mod">
+          <ac:chgData name="Srinivas" userId="0dfdf577-abd2-4267-93fe-1b178774e272" providerId="ADAL" clId="{26E41FBD-A856-477A-B280-770F18103933}" dt="2026-10-28T05:55:00.163" v="336" actId="1076"/>
+          <ac:spMkLst>
+            <pc:docMk/>
+            <pc:sldMk cId="0" sldId="257"/>
+            <ac:spMk id="60" creationId="{AB33D0D4-B9DE-8C30-DCF9-3C24400CB797}"/>
+          </ac:spMkLst>
+        </pc:spChg>
+        <pc:spChg chg="add del">
+          <ac:chgData name="Srinivas" userId="0dfdf577-abd2-4267-93fe-1b178774e272" providerId="ADAL" clId="{26E41FBD-A856-477A-B280-770F18103933}" dt="2026-10-28T06:04:26.975" v="444" actId="22"/>
+          <ac:spMkLst>
+            <pc:docMk/>
+            <pc:sldMk cId="0" sldId="257"/>
+            <ac:spMk id="74" creationId="{CB143D85-47F7-FA2E-FD57-FF742ECE3A7E}"/>
+          </ac:spMkLst>
+        </pc:spChg>
+        <pc:spChg chg="add del">
+          <ac:chgData name="Srinivas" userId="0dfdf577-abd2-4267-93fe-1b178774e272" providerId="ADAL" clId="{26E41FBD-A856-477A-B280-770F18103933}" dt="2026-10-28T06:04:35.672" v="446" actId="22"/>
+          <ac:spMkLst>
+            <pc:docMk/>
+            <pc:sldMk cId="0" sldId="257"/>
+            <ac:spMk id="76" creationId="{21B71EB3-35FB-E135-BBA8-57C3AB75EABF}"/>
+          </ac:spMkLst>
+        </pc:spChg>
+        <pc:spChg chg="add del">
+          <ac:chgData name="Srinivas" userId="0dfdf577-abd2-4267-93fe-1b178774e272" providerId="ADAL" clId="{26E41FBD-A856-477A-B280-770F18103933}" dt="2026-10-28T06:04:35.672" v="446" actId="22"/>
+          <ac:spMkLst>
+            <pc:docMk/>
+            <pc:sldMk cId="0" sldId="257"/>
+            <ac:spMk id="78" creationId="{4CC40F2E-06F7-04E5-5AFA-3C85EF073BE1}"/>
+          </ac:spMkLst>
+        </pc:spChg>
+        <pc:spChg chg="add del">
+          <ac:chgData name="Srinivas" userId="0dfdf577-abd2-4267-93fe-1b178774e272" providerId="ADAL" clId="{26E41FBD-A856-477A-B280-770F18103933}" dt="2026-10-28T06:04:59.423" v="448" actId="11529"/>
+          <ac:spMkLst>
+            <pc:docMk/>
+            <pc:sldMk cId="0" sldId="257"/>
+            <ac:spMk id="79" creationId="{23224ED2-137D-E0E1-3951-5DA3D9B243B8}"/>
+          </ac:spMkLst>
+        </pc:spChg>
+        <pc:spChg chg="add mod">
+          <ac:chgData name="Srinivas" userId="0dfdf577-abd2-4267-93fe-1b178774e272" providerId="ADAL" clId="{26E41FBD-A856-477A-B280-770F18103933}" dt="2026-10-28T06:05:18.008" v="450" actId="1076"/>
+          <ac:spMkLst>
+            <pc:docMk/>
+            <pc:sldMk cId="0" sldId="257"/>
+            <ac:spMk id="81" creationId="{E7AFA4E7-0F04-2704-3227-0D669F66A96C}"/>
+          </ac:spMkLst>
+        </pc:spChg>
+        <pc:spChg chg="add mod">
+          <ac:chgData name="Srinivas" userId="0dfdf577-abd2-4267-93fe-1b178774e272" providerId="ADAL" clId="{26E41FBD-A856-477A-B280-770F18103933}" dt="2026-10-28T06:05:33.007" v="458" actId="20577"/>
+          <ac:spMkLst>
+            <pc:docMk/>
+            <pc:sldMk cId="0" sldId="257"/>
+            <ac:spMk id="83" creationId="{B2EDA233-39CE-8B45-02E9-DFD685770BBF}"/>
+          </ac:spMkLst>
+        </pc:spChg>
+        <pc:spChg chg="add mod">
+          <ac:chgData name="Srinivas" userId="0dfdf577-abd2-4267-93fe-1b178774e272" providerId="ADAL" clId="{26E41FBD-A856-477A-B280-770F18103933}" dt="2026-10-28T06:05:25.749" v="452" actId="1076"/>
+          <ac:spMkLst>
+            <pc:docMk/>
+            <pc:sldMk cId="0" sldId="257"/>
+            <ac:spMk id="85" creationId="{24112598-531A-BD3A-8B84-0F6861F08AD8}"/>
+          </ac:spMkLst>
+        </pc:spChg>
+        <pc:spChg chg="add mod">
+          <ac:chgData name="Srinivas" userId="0dfdf577-abd2-4267-93fe-1b178774e272" providerId="ADAL" clId="{26E41FBD-A856-477A-B280-770F18103933}" dt="2026-10-28T06:05:29.665" v="456" actId="20577"/>
+          <ac:spMkLst>
+            <pc:docMk/>
+            <pc:sldMk cId="0" sldId="257"/>
+            <ac:spMk id="87" creationId="{7635E641-2934-449C-EF7A-D19D1EC0C3B3}"/>
+          </ac:spMkLst>
+        </pc:spChg>
+        <pc:grpChg chg="add del mod">
+          <ac:chgData name="Srinivas" userId="0dfdf577-abd2-4267-93fe-1b178774e272" providerId="ADAL" clId="{26E41FBD-A856-477A-B280-770F18103933}" dt="2026-10-28T05:58:27.200" v="378" actId="165"/>
+          <ac:grpSpMkLst>
+            <pc:docMk/>
+            <pc:sldMk cId="0" sldId="257"/>
+            <ac:grpSpMk id="61" creationId="{E1DCB13A-F2B4-F8BE-1F3F-746A04B856A3}"/>
+          </ac:grpSpMkLst>
+        </pc:grpChg>
+        <pc:grpChg chg="add mod">
+          <ac:chgData name="Srinivas" userId="0dfdf577-abd2-4267-93fe-1b178774e272" providerId="ADAL" clId="{26E41FBD-A856-477A-B280-770F18103933}" dt="2026-10-28T05:58:48.589" v="382" actId="14100"/>
+          <ac:grpSpMkLst>
+            <pc:docMk/>
+            <pc:sldMk cId="0" sldId="257"/>
+            <ac:grpSpMk id="62" creationId="{406BCB6B-1528-9E83-2AA3-0A4FD9FF4527}"/>
+          </ac:grpSpMkLst>
+        </pc:grpChg>
+        <pc:grpChg chg="add mod">
+          <ac:chgData name="Srinivas" userId="0dfdf577-abd2-4267-93fe-1b178774e272" providerId="ADAL" clId="{26E41FBD-A856-477A-B280-770F18103933}" dt="2026-10-28T05:58:50.899" v="383" actId="14100"/>
+          <ac:grpSpMkLst>
+            <pc:docMk/>
+            <pc:sldMk cId="0" sldId="257"/>
+            <ac:grpSpMk id="63" creationId="{581FDCB4-F22A-4665-059E-F8F0704725FF}"/>
+          </ac:grpSpMkLst>
+        </pc:grpChg>
+        <pc:grpChg chg="add mod">
+          <ac:chgData name="Srinivas" userId="0dfdf577-abd2-4267-93fe-1b178774e272" providerId="ADAL" clId="{26E41FBD-A856-477A-B280-770F18103933}" dt="2026-10-28T06:00:48.502" v="405" actId="1076"/>
+          <ac:grpSpMkLst>
+            <pc:docMk/>
+            <pc:sldMk cId="0" sldId="257"/>
+            <ac:grpSpMk id="64" creationId="{2F891225-EF94-BECE-8A8A-127888FD61FD}"/>
+          </ac:grpSpMkLst>
+        </pc:grpChg>
+        <pc:grpChg chg="add mod">
+          <ac:chgData name="Srinivas" userId="0dfdf577-abd2-4267-93fe-1b178774e272" providerId="ADAL" clId="{26E41FBD-A856-477A-B280-770F18103933}" dt="2026-10-28T05:58:14.402" v="375" actId="164"/>
+          <ac:grpSpMkLst>
+            <pc:docMk/>
+            <pc:sldMk cId="0" sldId="257"/>
+            <ac:grpSpMk id="65" creationId="{769855CE-1796-BF4D-7132-AEBF6C86462D}"/>
+          </ac:grpSpMkLst>
+        </pc:grpChg>
+        <pc:grpChg chg="add mod">
+          <ac:chgData name="Srinivas" userId="0dfdf577-abd2-4267-93fe-1b178774e272" providerId="ADAL" clId="{26E41FBD-A856-477A-B280-770F18103933}" dt="2026-10-28T05:58:44.904" v="381" actId="164"/>
+          <ac:grpSpMkLst>
+            <pc:docMk/>
+            <pc:sldMk cId="0" sldId="257"/>
+            <ac:grpSpMk id="66" creationId="{29635175-D707-CD1F-C10F-1761A2587EEF}"/>
+          </ac:grpSpMkLst>
+        </pc:grpChg>
+        <pc:grpChg chg="add del mod">
+          <ac:chgData name="Srinivas" userId="0dfdf577-abd2-4267-93fe-1b178774e272" providerId="ADAL" clId="{26E41FBD-A856-477A-B280-770F18103933}" dt="2026-10-28T06:04:05.593" v="440" actId="165"/>
+          <ac:grpSpMkLst>
+            <pc:docMk/>
+            <pc:sldMk cId="0" sldId="257"/>
+            <ac:grpSpMk id="72" creationId="{4E0161D0-B17A-97E2-8EC6-67DB51FE803D}"/>
+          </ac:grpSpMkLst>
+        </pc:grpChg>
+        <pc:cxnChg chg="add mod">
+          <ac:chgData name="Srinivas" userId="0dfdf577-abd2-4267-93fe-1b178774e272" providerId="ADAL" clId="{26E41FBD-A856-477A-B280-770F18103933}" dt="2026-10-28T06:01:21.043" v="411" actId="1582"/>
+          <ac:cxnSpMkLst>
+            <pc:docMk/>
+            <pc:sldMk cId="0" sldId="257"/>
+            <ac:cxnSpMk id="68" creationId="{BBF58180-5FED-D086-9D4E-7945D87B9923}"/>
+          </ac:cxnSpMkLst>
+        </pc:cxnChg>
+        <pc:cxnChg chg="add mod">
+          <ac:chgData name="Srinivas" userId="0dfdf577-abd2-4267-93fe-1b178774e272" providerId="ADAL" clId="{26E41FBD-A856-477A-B280-770F18103933}" dt="2026-10-28T06:01:36.997" v="415" actId="14100"/>
+          <ac:cxnSpMkLst>
+            <pc:docMk/>
+            <pc:sldMk cId="0" sldId="257"/>
+            <ac:cxnSpMk id="69" creationId="{000878A4-46F0-6DEA-2F14-D20DE319FD92}"/>
+          </ac:cxnSpMkLst>
+        </pc:cxnChg>
+      </pc:sldChg>
+      <pc:sldChg chg="addSp delSp modSp mod">
+        <pc:chgData name="Srinivas" userId="0dfdf577-abd2-4267-93fe-1b178774e272" providerId="ADAL" clId="{26E41FBD-A856-477A-B280-770F18103933}" dt="2026-10-28T06:17:31.059" v="546" actId="20577"/>
         <pc:sldMkLst>
           <pc:docMk/>
           <pc:sldMk cId="0" sldId="258"/>
         </pc:sldMkLst>
+        <pc:spChg chg="add del">
+          <ac:chgData name="Srinivas" userId="0dfdf577-abd2-4267-93fe-1b178774e272" providerId="ADAL" clId="{26E41FBD-A856-477A-B280-770F18103933}" dt="2026-10-28T06:11:08.070" v="462" actId="478"/>
+          <ac:spMkLst>
+            <pc:docMk/>
+            <pc:sldMk cId="0" sldId="258"/>
+            <ac:spMk id="10" creationId="{00000000-0000-0000-0000-000000000000}"/>
+          </ac:spMkLst>
+        </pc:spChg>
+        <pc:spChg chg="add del mod">
+          <ac:chgData name="Srinivas" userId="0dfdf577-abd2-4267-93fe-1b178774e272" providerId="ADAL" clId="{26E41FBD-A856-477A-B280-770F18103933}" dt="2026-10-28T06:11:42.868" v="515" actId="6549"/>
+          <ac:spMkLst>
+            <pc:docMk/>
+            <pc:sldMk cId="0" sldId="258"/>
+            <ac:spMk id="11" creationId="{00000000-0000-0000-0000-000000000000}"/>
+          </ac:spMkLst>
+        </pc:spChg>
         <pc:spChg chg="mod">
           <ac:chgData name="Srinivas" userId="0dfdf577-abd2-4267-93fe-1b178774e272" providerId="ADAL" clId="{26E41FBD-A856-477A-B280-770F18103933}" dt="2026-10-26T02:42:54.759" v="268" actId="20577"/>
           <ac:spMkLst>
@@ -185,7 +648,7 @@
           </ac:spMkLst>
         </pc:spChg>
         <pc:spChg chg="mod">
-          <ac:chgData name="Srinivas" userId="0dfdf577-abd2-4267-93fe-1b178774e272" providerId="ADAL" clId="{26E41FBD-A856-477A-B280-770F18103933}" dt="2026-10-25T13:27:33.575" v="152" actId="1076"/>
+          <ac:chgData name="Srinivas" userId="0dfdf577-abd2-4267-93fe-1b178774e272" providerId="ADAL" clId="{26E41FBD-A856-477A-B280-770F18103933}" dt="2026-10-28T06:17:31.059" v="546" actId="20577"/>
           <ac:spMkLst>
             <pc:docMk/>
             <pc:sldMk cId="0" sldId="258"/>
@@ -208,22 +671,13 @@
             <ac:spMk id="24" creationId="{00000000-0000-0000-0000-000000000000}"/>
           </ac:spMkLst>
         </pc:spChg>
-        <pc:spChg chg="del">
-          <ac:chgData name="Srinivas" userId="0dfdf577-abd2-4267-93fe-1b178774e272" providerId="ADAL" clId="{26E41FBD-A856-477A-B280-770F18103933}" dt="2026-10-25T13:25:19.089" v="0" actId="478"/>
-          <ac:spMkLst>
-            <pc:docMk/>
-            <pc:sldMk cId="0" sldId="258"/>
-            <ac:spMk id="25" creationId="{00000000-0000-0000-0000-000000000000}"/>
-          </ac:spMkLst>
-        </pc:spChg>
-        <pc:spChg chg="del">
-          <ac:chgData name="Srinivas" userId="0dfdf577-abd2-4267-93fe-1b178774e272" providerId="ADAL" clId="{26E41FBD-A856-477A-B280-770F18103933}" dt="2026-10-25T13:25:22.320" v="1" actId="478"/>
-          <ac:spMkLst>
-            <pc:docMk/>
-            <pc:sldMk cId="0" sldId="258"/>
-            <ac:spMk id="26" creationId="{00000000-0000-0000-0000-000000000000}"/>
-          </ac:spMkLst>
-        </pc:spChg>
+      </pc:sldChg>
+      <pc:sldChg chg="new del">
+        <pc:chgData name="Srinivas" userId="0dfdf577-abd2-4267-93fe-1b178774e272" providerId="ADAL" clId="{26E41FBD-A856-477A-B280-770F18103933}" dt="2026-10-28T06:10:46.743" v="459" actId="47"/>
+        <pc:sldMkLst>
+          <pc:docMk/>
+          <pc:sldMk cId="3772105075" sldId="259"/>
+        </pc:sldMkLst>
       </pc:sldChg>
     </pc:docChg>
   </pc:docChgLst>
@@ -1187,7 +1641,7 @@
                 <a:ea typeface="Calibri" pitchFamily="34" charset="-122"/>
                 <a:cs typeface="Calibri" pitchFamily="34" charset="-120"/>
               </a:rPr>
-              <a:t>Sales / Rental / RMA</a:t>
+              <a:t>Sales / Rental</a:t>
             </a:r>
             <a:endParaRPr lang="en-US" sz="1100" dirty="0"/>
           </a:p>
@@ -1479,24 +1933,7 @@
                 <a:ea typeface="Calibri" pitchFamily="34" charset="-122"/>
                 <a:cs typeface="Calibri" pitchFamily="34" charset="-120"/>
               </a:rPr>
-              <a:t>On delivery</a:t>
-            </a:r>
-            <a:endParaRPr lang="en-US" sz="850" dirty="0"/>
-          </a:p>
-          <a:p>
-            <a:pPr marL="0" indent="0" algn="ctr">
-              <a:buNone/>
-            </a:pPr>
-            <a:r>
-              <a:rPr lang="en-US" sz="850" b="1" dirty="0">
-                <a:solidFill>
-                  <a:srgbClr val="D98E1F"/>
-                </a:solidFill>
-                <a:latin typeface="Calibri" pitchFamily="34" charset="0"/>
-                <a:ea typeface="Calibri" pitchFamily="34" charset="-122"/>
-                <a:cs typeface="Calibri" pitchFamily="34" charset="-120"/>
-              </a:rPr>
-              <a:t>completed</a:t>
+              <a:t>On Confirmation</a:t>
             </a:r>
             <a:endParaRPr lang="en-US" sz="850" dirty="0"/>
           </a:p>
@@ -1788,7 +2225,7 @@
                 <a:ea typeface="Calibri" pitchFamily="34" charset="-122"/>
                 <a:cs typeface="Calibri" pitchFamily="34" charset="-120"/>
               </a:rPr>
-              <a:t>Pickup &amp; other services</a:t>
+              <a:t>Pickup &amp; Services</a:t>
             </a:r>
             <a:endParaRPr lang="en-US" sz="1100" dirty="0"/>
           </a:p>
@@ -2072,7 +2509,7 @@
               <a:buNone/>
             </a:pPr>
             <a:r>
-              <a:rPr lang="en-US" sz="850" b="1" dirty="0">
+              <a:rPr lang="en-US" sz="850" b="1">
                 <a:solidFill>
                   <a:srgbClr val="D98E1F"/>
                 </a:solidFill>
@@ -2080,7 +2517,7 @@
                 <a:ea typeface="Calibri" pitchFamily="34" charset="-122"/>
                 <a:cs typeface="Calibri" pitchFamily="34" charset="-120"/>
               </a:rPr>
-              <a:t>On pickup</a:t>
+              <a:t>On Confirmation</a:t>
             </a:r>
             <a:endParaRPr lang="en-US" sz="850" dirty="0"/>
           </a:p>
@@ -2722,8 +3159,8 @@
         </p:nvSpPr>
         <p:spPr>
           <a:xfrm>
-            <a:off x="365760" y="2770632"/>
-            <a:ext cx="8412480" cy="813816"/>
+            <a:off x="361679" y="2749170"/>
+            <a:ext cx="8412480" cy="894713"/>
           </a:xfrm>
           <a:prstGeom prst="roundRect">
             <a:avLst>
@@ -2743,13 +3180,1341 @@
       </p:sp>
       <p:sp>
         <p:nvSpPr>
+          <p:cNvPr id="13" name="Shape 11"/>
+          <p:cNvSpPr/>
+          <p:nvPr/>
+        </p:nvSpPr>
+        <p:spPr>
+          <a:xfrm>
+            <a:off x="369841" y="3643884"/>
+            <a:ext cx="8412480" cy="813816"/>
+          </a:xfrm>
+          <a:prstGeom prst="roundRect">
+            <a:avLst>
+              <a:gd name="adj" fmla="val 5618"/>
+            </a:avLst>
+          </a:prstGeom>
+          <a:solidFill>
+            <a:srgbClr val="FFFFFF"/>
+          </a:solidFill>
+          <a:ln w="12700">
+            <a:solidFill>
+              <a:srgbClr val="C5D2DC"/>
+            </a:solidFill>
+            <a:prstDash val="solid"/>
+          </a:ln>
+        </p:spPr>
+      </p:sp>
+      <p:sp>
+        <p:nvSpPr>
+          <p:cNvPr id="14" name="Shape 12"/>
+          <p:cNvSpPr/>
+          <p:nvPr/>
+        </p:nvSpPr>
+        <p:spPr>
+          <a:xfrm>
+            <a:off x="369841" y="2745450"/>
+            <a:ext cx="868680" cy="894711"/>
+          </a:xfrm>
+          <a:prstGeom prst="roundRect">
+            <a:avLst>
+              <a:gd name="adj" fmla="val 5618"/>
+            </a:avLst>
+          </a:prstGeom>
+          <a:solidFill>
+            <a:srgbClr val="D98E1F"/>
+          </a:solidFill>
+          <a:ln w="12700">
+            <a:solidFill>
+              <a:srgbClr val="D98E1F"/>
+            </a:solidFill>
+            <a:prstDash val="solid"/>
+          </a:ln>
+        </p:spPr>
+      </p:sp>
+      <p:sp>
+        <p:nvSpPr>
+          <p:cNvPr id="15" name="Text 13"/>
+          <p:cNvSpPr txBox="1"/>
+          <p:nvPr/>
+        </p:nvSpPr>
+        <p:spPr>
+          <a:xfrm>
+            <a:off x="434340" y="2864415"/>
+            <a:ext cx="868680" cy="700115"/>
+          </a:xfrm>
+          <a:prstGeom prst="rect">
+            <a:avLst/>
+          </a:prstGeom>
+          <a:noFill/>
+          <a:ln/>
+        </p:spPr>
+        <p:txBody>
+          <a:bodyPr wrap="square" lIns="25400" tIns="25400" rIns="25400" bIns="25400" rtlCol="0" anchor="ctr"/>
+          <a:lstStyle/>
+          <a:p>
+            <a:pPr marL="0" indent="0" algn="ctr">
+              <a:buNone/>
+            </a:pPr>
+            <a:r>
+              <a:rPr lang="en-US" sz="1000" b="1" dirty="0">
+                <a:solidFill>
+                  <a:srgbClr val="FFFFFF"/>
+                </a:solidFill>
+                <a:latin typeface="Calibri" pitchFamily="34" charset="0"/>
+                <a:ea typeface="Calibri" pitchFamily="34" charset="-122"/>
+                <a:cs typeface="Calibri" pitchFamily="34" charset="-120"/>
+              </a:rPr>
+              <a:t>Ascent</a:t>
+            </a:r>
+            <a:endParaRPr lang="en-US" sz="1000" dirty="0"/>
+          </a:p>
+        </p:txBody>
+      </p:sp>
+      <p:sp>
+        <p:nvSpPr>
+          <p:cNvPr id="16" name="Shape 14"/>
+          <p:cNvSpPr/>
+          <p:nvPr/>
+        </p:nvSpPr>
+        <p:spPr>
+          <a:xfrm>
+            <a:off x="1417320" y="1143000"/>
+            <a:ext cx="1188720" cy="594360"/>
+          </a:xfrm>
+          <a:prstGeom prst="roundRect">
+            <a:avLst>
+              <a:gd name="adj" fmla="val 12308"/>
+            </a:avLst>
+          </a:prstGeom>
+          <a:solidFill>
+            <a:srgbClr val="FFFFFF"/>
+          </a:solidFill>
+          <a:ln w="12700">
+            <a:solidFill>
+              <a:srgbClr val="0E7C86"/>
+            </a:solidFill>
+            <a:prstDash val="solid"/>
+          </a:ln>
+        </p:spPr>
+      </p:sp>
+      <p:sp>
+        <p:nvSpPr>
+          <p:cNvPr id="17" name="Shape 15"/>
+          <p:cNvSpPr/>
+          <p:nvPr/>
+        </p:nvSpPr>
+        <p:spPr>
+          <a:xfrm>
+            <a:off x="1344168" y="1069848"/>
+            <a:ext cx="219456" cy="219456"/>
+          </a:xfrm>
+          <a:prstGeom prst="ellipse">
+            <a:avLst/>
+          </a:prstGeom>
+          <a:solidFill>
+            <a:srgbClr val="0E7C86"/>
+          </a:solidFill>
+          <a:ln w="12700">
+            <a:solidFill>
+              <a:srgbClr val="FFFFFF"/>
+            </a:solidFill>
+            <a:prstDash val="solid"/>
+          </a:ln>
+        </p:spPr>
+      </p:sp>
+      <p:sp>
+        <p:nvSpPr>
+          <p:cNvPr id="18" name="Text 16"/>
+          <p:cNvSpPr txBox="1"/>
+          <p:nvPr/>
+        </p:nvSpPr>
+        <p:spPr>
+          <a:xfrm>
+            <a:off x="1344168" y="1069848"/>
+            <a:ext cx="219456" cy="219456"/>
+          </a:xfrm>
+          <a:prstGeom prst="rect">
+            <a:avLst/>
+          </a:prstGeom>
+          <a:noFill/>
+          <a:ln/>
+        </p:spPr>
+        <p:txBody>
+          <a:bodyPr wrap="square" lIns="0" tIns="0" rIns="0" bIns="0" rtlCol="0" anchor="ctr"/>
+          <a:lstStyle/>
+          <a:p>
+            <a:pPr marL="0" indent="0" algn="ctr">
+              <a:buNone/>
+            </a:pPr>
+            <a:r>
+              <a:rPr lang="en-US" sz="800" b="1" dirty="0">
+                <a:solidFill>
+                  <a:srgbClr val="FFFFFF"/>
+                </a:solidFill>
+                <a:latin typeface="Calibri" pitchFamily="34" charset="0"/>
+                <a:ea typeface="Calibri" pitchFamily="34" charset="-122"/>
+                <a:cs typeface="Calibri" pitchFamily="34" charset="-120"/>
+              </a:rPr>
+              <a:t>1</a:t>
+            </a:r>
+            <a:endParaRPr lang="en-US" sz="800" dirty="0"/>
+          </a:p>
+        </p:txBody>
+      </p:sp>
+      <p:sp>
+        <p:nvSpPr>
+          <p:cNvPr id="19" name="Text 17"/>
+          <p:cNvSpPr txBox="1"/>
+          <p:nvPr/>
+        </p:nvSpPr>
+        <p:spPr>
+          <a:xfrm>
+            <a:off x="1463040" y="1143000"/>
+            <a:ext cx="1097280" cy="594360"/>
+          </a:xfrm>
+          <a:prstGeom prst="rect">
+            <a:avLst/>
+          </a:prstGeom>
+          <a:noFill/>
+          <a:ln/>
+        </p:spPr>
+        <p:txBody>
+          <a:bodyPr wrap="square" lIns="0" tIns="0" rIns="0" bIns="0" rtlCol="0" anchor="ctr"/>
+          <a:lstStyle/>
+          <a:p>
+            <a:pPr marL="0" indent="0" algn="ctr">
+              <a:buNone/>
+            </a:pPr>
+            <a:r>
+              <a:rPr lang="en-US" sz="900" dirty="0">
+                <a:solidFill>
+                  <a:srgbClr val="1F2A37"/>
+                </a:solidFill>
+                <a:latin typeface="Calibri" pitchFamily="34" charset="0"/>
+                <a:ea typeface="Calibri" pitchFamily="34" charset="-122"/>
+                <a:cs typeface="Calibri" pitchFamily="34" charset="-120"/>
+              </a:rPr>
+              <a:t>Customer phones the CEC to request equipment</a:t>
+            </a:r>
+            <a:endParaRPr lang="en-US" sz="900" dirty="0"/>
+          </a:p>
+        </p:txBody>
+      </p:sp>
+      <p:sp>
+        <p:nvSpPr>
+          <p:cNvPr id="20" name="Shape 18"/>
+          <p:cNvSpPr/>
+          <p:nvPr/>
+        </p:nvSpPr>
+        <p:spPr>
+          <a:xfrm>
+            <a:off x="1417320" y="2011680"/>
+            <a:ext cx="1188720" cy="594360"/>
+          </a:xfrm>
+          <a:prstGeom prst="roundRect">
+            <a:avLst>
+              <a:gd name="adj" fmla="val 12308"/>
+            </a:avLst>
+          </a:prstGeom>
+          <a:solidFill>
+            <a:srgbClr val="FFFFFF"/>
+          </a:solidFill>
+          <a:ln w="12700">
+            <a:solidFill>
+              <a:srgbClr val="0E7C86"/>
+            </a:solidFill>
+            <a:prstDash val="solid"/>
+          </a:ln>
+        </p:spPr>
+      </p:sp>
+      <p:sp>
+        <p:nvSpPr>
+          <p:cNvPr id="21" name="Shape 19"/>
+          <p:cNvSpPr/>
+          <p:nvPr/>
+        </p:nvSpPr>
+        <p:spPr>
+          <a:xfrm>
+            <a:off x="1344168" y="1938528"/>
+            <a:ext cx="219456" cy="219456"/>
+          </a:xfrm>
+          <a:prstGeom prst="ellipse">
+            <a:avLst/>
+          </a:prstGeom>
+          <a:solidFill>
+            <a:srgbClr val="0E7C86"/>
+          </a:solidFill>
+          <a:ln w="12700">
+            <a:solidFill>
+              <a:srgbClr val="FFFFFF"/>
+            </a:solidFill>
+            <a:prstDash val="solid"/>
+          </a:ln>
+        </p:spPr>
+      </p:sp>
+      <p:sp>
+        <p:nvSpPr>
+          <p:cNvPr id="22" name="Text 20"/>
+          <p:cNvSpPr txBox="1"/>
+          <p:nvPr/>
+        </p:nvSpPr>
+        <p:spPr>
+          <a:xfrm>
+            <a:off x="1344168" y="1938528"/>
+            <a:ext cx="219456" cy="219456"/>
+          </a:xfrm>
+          <a:prstGeom prst="rect">
+            <a:avLst/>
+          </a:prstGeom>
+          <a:noFill/>
+          <a:ln/>
+        </p:spPr>
+        <p:txBody>
+          <a:bodyPr wrap="square" lIns="0" tIns="0" rIns="0" bIns="0" rtlCol="0" anchor="ctr"/>
+          <a:lstStyle/>
+          <a:p>
+            <a:pPr marL="0" indent="0" algn="ctr">
+              <a:buNone/>
+            </a:pPr>
+            <a:r>
+              <a:rPr lang="en-US" sz="800" b="1" dirty="0">
+                <a:solidFill>
+                  <a:srgbClr val="FFFFFF"/>
+                </a:solidFill>
+                <a:latin typeface="Calibri" pitchFamily="34" charset="0"/>
+                <a:ea typeface="Calibri" pitchFamily="34" charset="-122"/>
+                <a:cs typeface="Calibri" pitchFamily="34" charset="-120"/>
+              </a:rPr>
+              <a:t>2</a:t>
+            </a:r>
+            <a:endParaRPr lang="en-US" sz="800" dirty="0"/>
+          </a:p>
+        </p:txBody>
+      </p:sp>
+      <p:sp>
+        <p:nvSpPr>
+          <p:cNvPr id="23" name="Text 21"/>
+          <p:cNvSpPr txBox="1"/>
+          <p:nvPr/>
+        </p:nvSpPr>
+        <p:spPr>
+          <a:xfrm>
+            <a:off x="1463040" y="2011680"/>
+            <a:ext cx="1097280" cy="594360"/>
+          </a:xfrm>
+          <a:prstGeom prst="rect">
+            <a:avLst/>
+          </a:prstGeom>
+          <a:noFill/>
+          <a:ln/>
+        </p:spPr>
+        <p:txBody>
+          <a:bodyPr wrap="square" lIns="0" tIns="0" rIns="0" bIns="0" rtlCol="0" anchor="ctr"/>
+          <a:lstStyle/>
+          <a:p>
+            <a:pPr marL="0" indent="0" algn="ctr">
+              <a:buNone/>
+            </a:pPr>
+            <a:r>
+              <a:rPr lang="en-US" sz="900" dirty="0">
+                <a:solidFill>
+                  <a:srgbClr val="1F2A37"/>
+                </a:solidFill>
+                <a:latin typeface="Calibri" pitchFamily="34" charset="0"/>
+                <a:ea typeface="Calibri" pitchFamily="34" charset="-122"/>
+                <a:cs typeface="Calibri" pitchFamily="34" charset="-120"/>
+              </a:rPr>
+              <a:t>Log in to Salesforce, find the account</a:t>
+            </a:r>
+            <a:endParaRPr lang="en-US" sz="900" dirty="0"/>
+          </a:p>
+        </p:txBody>
+      </p:sp>
+      <p:sp>
+        <p:nvSpPr>
+          <p:cNvPr id="24" name="Shape 22"/>
+          <p:cNvSpPr/>
+          <p:nvPr/>
+        </p:nvSpPr>
+        <p:spPr>
+          <a:xfrm>
+            <a:off x="2834640" y="2011680"/>
+            <a:ext cx="1188720" cy="594360"/>
+          </a:xfrm>
+          <a:prstGeom prst="roundRect">
+            <a:avLst>
+              <a:gd name="adj" fmla="val 12308"/>
+            </a:avLst>
+          </a:prstGeom>
+          <a:solidFill>
+            <a:srgbClr val="FFFFFF"/>
+          </a:solidFill>
+          <a:ln w="12700">
+            <a:solidFill>
+              <a:srgbClr val="0E7C86"/>
+            </a:solidFill>
+            <a:prstDash val="solid"/>
+          </a:ln>
+        </p:spPr>
+      </p:sp>
+      <p:sp>
+        <p:nvSpPr>
+          <p:cNvPr id="25" name="Shape 23"/>
+          <p:cNvSpPr/>
+          <p:nvPr/>
+        </p:nvSpPr>
+        <p:spPr>
+          <a:xfrm>
+            <a:off x="2761488" y="1938528"/>
+            <a:ext cx="219456" cy="219456"/>
+          </a:xfrm>
+          <a:prstGeom prst="ellipse">
+            <a:avLst/>
+          </a:prstGeom>
+          <a:solidFill>
+            <a:srgbClr val="0E7C86"/>
+          </a:solidFill>
+          <a:ln w="12700">
+            <a:solidFill>
+              <a:srgbClr val="FFFFFF"/>
+            </a:solidFill>
+            <a:prstDash val="solid"/>
+          </a:ln>
+        </p:spPr>
+      </p:sp>
+      <p:sp>
+        <p:nvSpPr>
+          <p:cNvPr id="26" name="Text 24"/>
+          <p:cNvSpPr txBox="1"/>
+          <p:nvPr/>
+        </p:nvSpPr>
+        <p:spPr>
+          <a:xfrm>
+            <a:off x="2761488" y="1938528"/>
+            <a:ext cx="219456" cy="219456"/>
+          </a:xfrm>
+          <a:prstGeom prst="rect">
+            <a:avLst/>
+          </a:prstGeom>
+          <a:noFill/>
+          <a:ln/>
+        </p:spPr>
+        <p:txBody>
+          <a:bodyPr wrap="square" lIns="0" tIns="0" rIns="0" bIns="0" rtlCol="0" anchor="ctr"/>
+          <a:lstStyle/>
+          <a:p>
+            <a:pPr marL="0" indent="0" algn="ctr">
+              <a:buNone/>
+            </a:pPr>
+            <a:r>
+              <a:rPr lang="en-US" sz="800" b="1" dirty="0">
+                <a:solidFill>
+                  <a:srgbClr val="FFFFFF"/>
+                </a:solidFill>
+                <a:latin typeface="Calibri" pitchFamily="34" charset="0"/>
+                <a:ea typeface="Calibri" pitchFamily="34" charset="-122"/>
+                <a:cs typeface="Calibri" pitchFamily="34" charset="-120"/>
+              </a:rPr>
+              <a:t>3</a:t>
+            </a:r>
+            <a:endParaRPr lang="en-US" sz="800" dirty="0"/>
+          </a:p>
+        </p:txBody>
+      </p:sp>
+      <p:sp>
+        <p:nvSpPr>
+          <p:cNvPr id="27" name="Text 25"/>
+          <p:cNvSpPr txBox="1"/>
+          <p:nvPr/>
+        </p:nvSpPr>
+        <p:spPr>
+          <a:xfrm>
+            <a:off x="2880360" y="2011680"/>
+            <a:ext cx="1097280" cy="594360"/>
+          </a:xfrm>
+          <a:prstGeom prst="rect">
+            <a:avLst/>
+          </a:prstGeom>
+          <a:noFill/>
+          <a:ln/>
+        </p:spPr>
+        <p:txBody>
+          <a:bodyPr wrap="square" lIns="0" tIns="0" rIns="0" bIns="0" rtlCol="0" anchor="ctr"/>
+          <a:lstStyle/>
+          <a:p>
+            <a:pPr marL="0" indent="0" algn="ctr">
+              <a:buNone/>
+            </a:pPr>
+            <a:r>
+              <a:rPr lang="en-US" sz="900" dirty="0">
+                <a:solidFill>
+                  <a:srgbClr val="1F2A37"/>
+                </a:solidFill>
+                <a:latin typeface="Calibri" pitchFamily="34" charset="0"/>
+                <a:ea typeface="Calibri" pitchFamily="34" charset="-122"/>
+                <a:cs typeface="Calibri" pitchFamily="34" charset="-120"/>
+              </a:rPr>
+              <a:t>Create the Intake with caller, items and dates</a:t>
+            </a:r>
+            <a:endParaRPr lang="en-US" sz="900" dirty="0"/>
+          </a:p>
+        </p:txBody>
+      </p:sp>
+      <p:grpSp>
+        <p:nvGrpSpPr>
+          <p:cNvPr id="64" name="Group 63">
+            <a:extLst>
+              <a:ext uri="{FF2B5EF4-FFF2-40B4-BE49-F238E27FC236}">
+                <a16:creationId xmlns:a16="http://schemas.microsoft.com/office/drawing/2014/main" id="{2F891225-EF94-BECE-8A8A-127888FD61FD}"/>
+              </a:ext>
+            </a:extLst>
+          </p:cNvPr>
+          <p:cNvGrpSpPr/>
+          <p:nvPr/>
+        </p:nvGrpSpPr>
+        <p:grpSpPr>
+          <a:xfrm>
+            <a:off x="5409523" y="3827581"/>
+            <a:ext cx="1188720" cy="644815"/>
+            <a:chOff x="1645920" y="3735161"/>
+            <a:chExt cx="1188720" cy="644815"/>
+          </a:xfrm>
+        </p:grpSpPr>
+        <p:sp>
+          <p:nvSpPr>
+            <p:cNvPr id="28" name="Shape 26"/>
+            <p:cNvSpPr/>
+            <p:nvPr/>
+          </p:nvSpPr>
+          <p:spPr>
+            <a:xfrm>
+              <a:off x="1645920" y="3735161"/>
+              <a:ext cx="1188720" cy="594360"/>
+            </a:xfrm>
+            <a:prstGeom prst="roundRect">
+              <a:avLst>
+                <a:gd name="adj" fmla="val 12308"/>
+              </a:avLst>
+            </a:prstGeom>
+            <a:solidFill>
+              <a:srgbClr val="FFFFFF"/>
+            </a:solidFill>
+            <a:ln w="12700">
+              <a:solidFill>
+                <a:srgbClr val="0E7C86"/>
+              </a:solidFill>
+              <a:prstDash val="solid"/>
+            </a:ln>
+          </p:spPr>
+        </p:sp>
+        <p:sp>
+          <p:nvSpPr>
+            <p:cNvPr id="31" name="Text 29"/>
+            <p:cNvSpPr txBox="1"/>
+            <p:nvPr/>
+          </p:nvSpPr>
+          <p:spPr>
+            <a:xfrm>
+              <a:off x="1737360" y="3785616"/>
+              <a:ext cx="1097280" cy="594360"/>
+            </a:xfrm>
+            <a:prstGeom prst="rect">
+              <a:avLst/>
+            </a:prstGeom>
+            <a:noFill/>
+            <a:ln/>
+          </p:spPr>
+          <p:txBody>
+            <a:bodyPr wrap="square" lIns="0" tIns="0" rIns="0" bIns="0" rtlCol="0" anchor="ctr"/>
+            <a:lstStyle/>
+            <a:p>
+              <a:pPr marL="0" indent="0" algn="ctr">
+                <a:buNone/>
+              </a:pPr>
+              <a:r>
+                <a:rPr lang="en-US" sz="900" dirty="0">
+                  <a:solidFill>
+                    <a:srgbClr val="1F2A37"/>
+                  </a:solidFill>
+                  <a:latin typeface="Calibri" pitchFamily="34" charset="0"/>
+                  <a:ea typeface="Calibri" pitchFamily="34" charset="-122"/>
+                  <a:cs typeface="Calibri" pitchFamily="34" charset="-120"/>
+                </a:rPr>
+                <a:t>Branch set from service area, CSR assigned</a:t>
+              </a:r>
+              <a:endParaRPr lang="en-US" sz="900" dirty="0"/>
+            </a:p>
+          </p:txBody>
+        </p:sp>
+      </p:grpSp>
+      <p:grpSp>
+        <p:nvGrpSpPr>
+          <p:cNvPr id="65" name="Group 64">
+            <a:extLst>
+              <a:ext uri="{FF2B5EF4-FFF2-40B4-BE49-F238E27FC236}">
+                <a16:creationId xmlns:a16="http://schemas.microsoft.com/office/drawing/2014/main" id="{769855CE-1796-BF4D-7132-AEBF6C86462D}"/>
+              </a:ext>
+            </a:extLst>
+          </p:cNvPr>
+          <p:cNvGrpSpPr/>
+          <p:nvPr/>
+        </p:nvGrpSpPr>
+        <p:grpSpPr>
+          <a:xfrm>
+            <a:off x="5673362" y="1926773"/>
+            <a:ext cx="1152797" cy="731520"/>
+            <a:chOff x="5673362" y="1926773"/>
+            <a:chExt cx="1152797" cy="731520"/>
+          </a:xfrm>
+        </p:grpSpPr>
+        <p:sp>
+          <p:nvSpPr>
+            <p:cNvPr id="32" name="Shape 30"/>
+            <p:cNvSpPr/>
+            <p:nvPr/>
+          </p:nvSpPr>
+          <p:spPr>
+            <a:xfrm>
+              <a:off x="5673362" y="1926773"/>
+              <a:ext cx="1152797" cy="731520"/>
+            </a:xfrm>
+            <a:prstGeom prst="diamond">
+              <a:avLst/>
+            </a:prstGeom>
+            <a:solidFill>
+              <a:srgbClr val="FBF0DB"/>
+            </a:solidFill>
+            <a:ln w="15240">
+              <a:solidFill>
+                <a:srgbClr val="D98E1F"/>
+              </a:solidFill>
+              <a:prstDash val="solid"/>
+            </a:ln>
+          </p:spPr>
+        </p:sp>
+        <p:sp>
+          <p:nvSpPr>
+            <p:cNvPr id="33" name="Text 31"/>
+            <p:cNvSpPr txBox="1"/>
+            <p:nvPr/>
+          </p:nvSpPr>
+          <p:spPr>
+            <a:xfrm>
+              <a:off x="5826524" y="1926773"/>
+              <a:ext cx="882393" cy="731520"/>
+            </a:xfrm>
+            <a:prstGeom prst="rect">
+              <a:avLst/>
+            </a:prstGeom>
+            <a:noFill/>
+            <a:ln/>
+          </p:spPr>
+          <p:txBody>
+            <a:bodyPr wrap="square" lIns="0" tIns="0" rIns="0" bIns="0" rtlCol="0" anchor="ctr"/>
+            <a:lstStyle/>
+            <a:p>
+              <a:pPr marL="0" indent="0" algn="ctr">
+                <a:buNone/>
+              </a:pPr>
+              <a:r>
+                <a:rPr lang="en-US" sz="850" b="1" dirty="0">
+                  <a:solidFill>
+                    <a:srgbClr val="14283D"/>
+                  </a:solidFill>
+                  <a:latin typeface="Calibri" pitchFamily="34" charset="0"/>
+                  <a:ea typeface="Calibri" pitchFamily="34" charset="-122"/>
+                  <a:cs typeface="Calibri" pitchFamily="34" charset="-120"/>
+                </a:rPr>
+                <a:t>Delivery or Pickup?</a:t>
+              </a:r>
+              <a:endParaRPr lang="en-US" sz="850" dirty="0"/>
+            </a:p>
+          </p:txBody>
+        </p:sp>
+      </p:grpSp>
+      <p:sp>
+        <p:nvSpPr>
+          <p:cNvPr id="34" name="Shape 32"/>
+          <p:cNvSpPr/>
+          <p:nvPr/>
+        </p:nvSpPr>
+        <p:spPr>
+          <a:xfrm>
+            <a:off x="2011680" y="1737360"/>
+            <a:ext cx="0" cy="274320"/>
+          </a:xfrm>
+          <a:prstGeom prst="line">
+            <a:avLst/>
+          </a:prstGeom>
+          <a:noFill/>
+          <a:ln w="19050">
+            <a:solidFill>
+              <a:srgbClr val="0E7C86"/>
+            </a:solidFill>
+            <a:prstDash val="solid"/>
+            <a:tailEnd type="triangle"/>
+          </a:ln>
+        </p:spPr>
+      </p:sp>
+      <p:sp>
+        <p:nvSpPr>
+          <p:cNvPr id="35" name="Shape 33"/>
+          <p:cNvSpPr/>
+          <p:nvPr/>
+        </p:nvSpPr>
+        <p:spPr>
+          <a:xfrm>
+            <a:off x="2606040" y="2308860"/>
+            <a:ext cx="228600" cy="0"/>
+          </a:xfrm>
+          <a:prstGeom prst="line">
+            <a:avLst/>
+          </a:prstGeom>
+          <a:noFill/>
+          <a:ln w="19050">
+            <a:solidFill>
+              <a:srgbClr val="0E7C86"/>
+            </a:solidFill>
+            <a:prstDash val="solid"/>
+            <a:tailEnd type="triangle"/>
+          </a:ln>
+        </p:spPr>
+      </p:sp>
+      <p:sp>
+        <p:nvSpPr>
+          <p:cNvPr id="37" name="Shape 35"/>
+          <p:cNvSpPr/>
+          <p:nvPr/>
+        </p:nvSpPr>
+        <p:spPr>
+          <a:xfrm>
+            <a:off x="5489993" y="2291606"/>
+            <a:ext cx="183369" cy="0"/>
+          </a:xfrm>
+          <a:prstGeom prst="line">
+            <a:avLst/>
+          </a:prstGeom>
+          <a:noFill/>
+          <a:ln w="19050">
+            <a:solidFill>
+              <a:srgbClr val="0E7C86"/>
+            </a:solidFill>
+            <a:prstDash val="solid"/>
+            <a:tailEnd type="triangle"/>
+          </a:ln>
+        </p:spPr>
+      </p:sp>
+      <p:grpSp>
+        <p:nvGrpSpPr>
+          <p:cNvPr id="62" name="Group 61">
+            <a:extLst>
+              <a:ext uri="{FF2B5EF4-FFF2-40B4-BE49-F238E27FC236}">
+                <a16:creationId xmlns:a16="http://schemas.microsoft.com/office/drawing/2014/main" id="{406BCB6B-1528-9E83-2AA3-0A4FD9FF4527}"/>
+              </a:ext>
+            </a:extLst>
+          </p:cNvPr>
+          <p:cNvGrpSpPr/>
+          <p:nvPr/>
+        </p:nvGrpSpPr>
+        <p:grpSpPr>
+          <a:xfrm>
+            <a:off x="3754202" y="3051483"/>
+            <a:ext cx="1737360" cy="556642"/>
+            <a:chOff x="4593227" y="3209381"/>
+            <a:chExt cx="1737360" cy="626691"/>
+          </a:xfrm>
+        </p:grpSpPr>
+        <p:sp>
+          <p:nvSpPr>
+            <p:cNvPr id="42" name="Shape 40"/>
+            <p:cNvSpPr/>
+            <p:nvPr/>
+          </p:nvSpPr>
+          <p:spPr>
+            <a:xfrm>
+              <a:off x="4593227" y="3241712"/>
+              <a:ext cx="1737360" cy="594360"/>
+            </a:xfrm>
+            <a:prstGeom prst="roundRect">
+              <a:avLst>
+                <a:gd name="adj" fmla="val 12308"/>
+              </a:avLst>
+            </a:prstGeom>
+            <a:solidFill>
+              <a:srgbClr val="FBF0DB"/>
+            </a:solidFill>
+            <a:ln w="12700">
+              <a:solidFill>
+                <a:srgbClr val="D98E1F"/>
+              </a:solidFill>
+              <a:prstDash val="solid"/>
+            </a:ln>
+          </p:spPr>
+        </p:sp>
+        <p:sp>
+          <p:nvSpPr>
+            <p:cNvPr id="43" name="Text 41"/>
+            <p:cNvSpPr txBox="1"/>
+            <p:nvPr/>
+          </p:nvSpPr>
+          <p:spPr>
+            <a:xfrm>
+              <a:off x="4659357" y="3209381"/>
+              <a:ext cx="1645920" cy="594360"/>
+            </a:xfrm>
+            <a:prstGeom prst="rect">
+              <a:avLst/>
+            </a:prstGeom>
+            <a:noFill/>
+            <a:ln/>
+          </p:spPr>
+          <p:txBody>
+            <a:bodyPr wrap="square" lIns="0" tIns="0" rIns="0" bIns="0" rtlCol="0" anchor="ctr"/>
+            <a:lstStyle/>
+            <a:p>
+              <a:pPr marL="0" indent="0" algn="ctr">
+                <a:buNone/>
+              </a:pPr>
+              <a:r>
+                <a:rPr lang="en-US" sz="900" dirty="0">
+                  <a:solidFill>
+                    <a:srgbClr val="1F2A37"/>
+                  </a:solidFill>
+                  <a:latin typeface="Calibri" pitchFamily="34" charset="0"/>
+                  <a:ea typeface="Calibri" pitchFamily="34" charset="-122"/>
+                  <a:cs typeface="Calibri" pitchFamily="34" charset="-120"/>
+                </a:rPr>
+                <a:t>Delivery: Sales Order and Lines created once delivery is completed</a:t>
+              </a:r>
+              <a:endParaRPr lang="en-US" sz="900" dirty="0"/>
+            </a:p>
+          </p:txBody>
+        </p:sp>
+      </p:grpSp>
+      <p:grpSp>
+        <p:nvGrpSpPr>
+          <p:cNvPr id="63" name="Group 62">
+            <a:extLst>
+              <a:ext uri="{FF2B5EF4-FFF2-40B4-BE49-F238E27FC236}">
+                <a16:creationId xmlns:a16="http://schemas.microsoft.com/office/drawing/2014/main" id="{581FDCB4-F22A-4665-059E-F8F0704725FF}"/>
+              </a:ext>
+            </a:extLst>
+          </p:cNvPr>
+          <p:cNvGrpSpPr/>
+          <p:nvPr/>
+        </p:nvGrpSpPr>
+        <p:grpSpPr>
+          <a:xfrm>
+            <a:off x="6272857" y="3063240"/>
+            <a:ext cx="1737360" cy="523168"/>
+            <a:chOff x="5120640" y="3749040"/>
+            <a:chExt cx="1737360" cy="594360"/>
+          </a:xfrm>
+        </p:grpSpPr>
+        <p:sp>
+          <p:nvSpPr>
+            <p:cNvPr id="44" name="Shape 42"/>
+            <p:cNvSpPr/>
+            <p:nvPr/>
+          </p:nvSpPr>
+          <p:spPr>
+            <a:xfrm>
+              <a:off x="5120640" y="3749040"/>
+              <a:ext cx="1737360" cy="594360"/>
+            </a:xfrm>
+            <a:prstGeom prst="roundRect">
+              <a:avLst>
+                <a:gd name="adj" fmla="val 12308"/>
+              </a:avLst>
+            </a:prstGeom>
+            <a:solidFill>
+              <a:srgbClr val="FBF0DB"/>
+            </a:solidFill>
+            <a:ln w="12700">
+              <a:solidFill>
+                <a:srgbClr val="D98E1F"/>
+              </a:solidFill>
+              <a:prstDash val="solid"/>
+            </a:ln>
+          </p:spPr>
+        </p:sp>
+        <p:sp>
+          <p:nvSpPr>
+            <p:cNvPr id="45" name="Text 43"/>
+            <p:cNvSpPr txBox="1"/>
+            <p:nvPr/>
+          </p:nvSpPr>
+          <p:spPr>
+            <a:xfrm>
+              <a:off x="5166360" y="3749040"/>
+              <a:ext cx="1645920" cy="594360"/>
+            </a:xfrm>
+            <a:prstGeom prst="rect">
+              <a:avLst/>
+            </a:prstGeom>
+            <a:noFill/>
+            <a:ln/>
+          </p:spPr>
+          <p:txBody>
+            <a:bodyPr wrap="square" lIns="0" tIns="0" rIns="0" bIns="0" rtlCol="0" anchor="ctr"/>
+            <a:lstStyle/>
+            <a:p>
+              <a:pPr marL="0" indent="0" algn="ctr">
+                <a:buNone/>
+              </a:pPr>
+              <a:r>
+                <a:rPr lang="en-US" sz="900" dirty="0">
+                  <a:solidFill>
+                    <a:srgbClr val="1F2A37"/>
+                  </a:solidFill>
+                  <a:latin typeface="Calibri" pitchFamily="34" charset="0"/>
+                  <a:ea typeface="Calibri" pitchFamily="34" charset="-122"/>
+                  <a:cs typeface="Calibri" pitchFamily="34" charset="-120"/>
+                </a:rPr>
+                <a:t>Pickup: Work Order and Lines created, active at once</a:t>
+              </a:r>
+              <a:endParaRPr lang="en-US" sz="900" dirty="0"/>
+            </a:p>
+          </p:txBody>
+        </p:sp>
+      </p:grpSp>
+      <p:grpSp>
+        <p:nvGrpSpPr>
+          <p:cNvPr id="66" name="Group 65">
+            <a:extLst>
+              <a:ext uri="{FF2B5EF4-FFF2-40B4-BE49-F238E27FC236}">
+                <a16:creationId xmlns:a16="http://schemas.microsoft.com/office/drawing/2014/main" id="{29635175-D707-CD1F-C10F-1761A2587EEF}"/>
+              </a:ext>
+            </a:extLst>
+          </p:cNvPr>
+          <p:cNvGrpSpPr/>
+          <p:nvPr/>
+        </p:nvGrpSpPr>
+        <p:grpSpPr>
+          <a:xfrm>
+            <a:off x="4604657" y="2661231"/>
+            <a:ext cx="3309475" cy="424542"/>
+            <a:chOff x="4604657" y="2661231"/>
+            <a:chExt cx="3309475" cy="424542"/>
+          </a:xfrm>
+        </p:grpSpPr>
+        <p:sp>
+          <p:nvSpPr>
+            <p:cNvPr id="38" name="Shape 36"/>
+            <p:cNvSpPr/>
+            <p:nvPr/>
+          </p:nvSpPr>
+          <p:spPr>
+            <a:xfrm>
+              <a:off x="6240490" y="2661231"/>
+              <a:ext cx="0" cy="250806"/>
+            </a:xfrm>
+            <a:prstGeom prst="line">
+              <a:avLst/>
+            </a:prstGeom>
+            <a:noFill/>
+            <a:ln w="19050">
+              <a:solidFill>
+                <a:srgbClr val="D98E1F"/>
+              </a:solidFill>
+              <a:prstDash val="solid"/>
+            </a:ln>
+          </p:spPr>
+        </p:sp>
+        <p:sp>
+          <p:nvSpPr>
+            <p:cNvPr id="39" name="Shape 37"/>
+            <p:cNvSpPr/>
+            <p:nvPr/>
+          </p:nvSpPr>
+          <p:spPr>
+            <a:xfrm>
+              <a:off x="4604657" y="2921181"/>
+              <a:ext cx="2536880" cy="0"/>
+            </a:xfrm>
+            <a:prstGeom prst="line">
+              <a:avLst/>
+            </a:prstGeom>
+            <a:noFill/>
+            <a:ln w="19050">
+              <a:solidFill>
+                <a:srgbClr val="D98E1F"/>
+              </a:solidFill>
+              <a:prstDash val="solid"/>
+            </a:ln>
+          </p:spPr>
+        </p:sp>
+        <p:sp>
+          <p:nvSpPr>
+            <p:cNvPr id="40" name="Shape 38"/>
+            <p:cNvSpPr/>
+            <p:nvPr/>
+          </p:nvSpPr>
+          <p:spPr>
+            <a:xfrm>
+              <a:off x="4604657" y="2912037"/>
+              <a:ext cx="0" cy="164592"/>
+            </a:xfrm>
+            <a:prstGeom prst="line">
+              <a:avLst/>
+            </a:prstGeom>
+            <a:noFill/>
+            <a:ln w="19050">
+              <a:solidFill>
+                <a:srgbClr val="D98E1F"/>
+              </a:solidFill>
+              <a:prstDash val="solid"/>
+              <a:tailEnd type="triangle"/>
+            </a:ln>
+          </p:spPr>
+        </p:sp>
+        <p:sp>
+          <p:nvSpPr>
+            <p:cNvPr id="41" name="Shape 39"/>
+            <p:cNvSpPr/>
+            <p:nvPr/>
+          </p:nvSpPr>
+          <p:spPr>
+            <a:xfrm>
+              <a:off x="7141537" y="2912037"/>
+              <a:ext cx="0" cy="164592"/>
+            </a:xfrm>
+            <a:prstGeom prst="line">
+              <a:avLst/>
+            </a:prstGeom>
+            <a:noFill/>
+            <a:ln w="19050">
+              <a:solidFill>
+                <a:srgbClr val="D98E1F"/>
+              </a:solidFill>
+              <a:prstDash val="solid"/>
+              <a:tailEnd type="triangle"/>
+            </a:ln>
+          </p:spPr>
+        </p:sp>
+        <p:sp>
+          <p:nvSpPr>
+            <p:cNvPr id="46" name="Text 44"/>
+            <p:cNvSpPr txBox="1"/>
+            <p:nvPr/>
+          </p:nvSpPr>
+          <p:spPr>
+            <a:xfrm>
+              <a:off x="4685376" y="2921181"/>
+              <a:ext cx="691876" cy="164592"/>
+            </a:xfrm>
+            <a:prstGeom prst="rect">
+              <a:avLst/>
+            </a:prstGeom>
+            <a:noFill/>
+            <a:ln/>
+          </p:spPr>
+          <p:txBody>
+            <a:bodyPr wrap="square" lIns="0" tIns="0" rIns="0" bIns="0" rtlCol="0" anchor="ctr"/>
+            <a:lstStyle/>
+            <a:p>
+              <a:pPr marL="0" indent="0">
+                <a:buNone/>
+              </a:pPr>
+              <a:r>
+                <a:rPr lang="en-US" sz="800" b="1" dirty="0">
+                  <a:solidFill>
+                    <a:srgbClr val="D98E1F"/>
+                  </a:solidFill>
+                  <a:latin typeface="Calibri" pitchFamily="34" charset="0"/>
+                  <a:ea typeface="Calibri" pitchFamily="34" charset="-122"/>
+                  <a:cs typeface="Calibri" pitchFamily="34" charset="-120"/>
+                </a:rPr>
+                <a:t>Delivery</a:t>
+              </a:r>
+              <a:endParaRPr lang="en-US" sz="800" dirty="0"/>
+            </a:p>
+          </p:txBody>
+        </p:sp>
+        <p:sp>
+          <p:nvSpPr>
+            <p:cNvPr id="47" name="Text 45"/>
+            <p:cNvSpPr txBox="1"/>
+            <p:nvPr/>
+          </p:nvSpPr>
+          <p:spPr>
+            <a:xfrm>
+              <a:off x="7222256" y="2921181"/>
+              <a:ext cx="691876" cy="164592"/>
+            </a:xfrm>
+            <a:prstGeom prst="rect">
+              <a:avLst/>
+            </a:prstGeom>
+            <a:noFill/>
+            <a:ln/>
+          </p:spPr>
+          <p:txBody>
+            <a:bodyPr wrap="square" lIns="0" tIns="0" rIns="0" bIns="0" rtlCol="0" anchor="ctr"/>
+            <a:lstStyle/>
+            <a:p>
+              <a:pPr marL="0" indent="0">
+                <a:buNone/>
+              </a:pPr>
+              <a:r>
+                <a:rPr lang="en-US" sz="800" b="1" dirty="0">
+                  <a:solidFill>
+                    <a:srgbClr val="D98E1F"/>
+                  </a:solidFill>
+                  <a:latin typeface="Calibri" pitchFamily="34" charset="0"/>
+                  <a:ea typeface="Calibri" pitchFamily="34" charset="-122"/>
+                  <a:cs typeface="Calibri" pitchFamily="34" charset="-120"/>
+                </a:rPr>
+                <a:t>Pickup</a:t>
+              </a:r>
+              <a:endParaRPr lang="en-US" sz="800" dirty="0"/>
+            </a:p>
+          </p:txBody>
+        </p:sp>
+      </p:grpSp>
+      <p:sp>
+        <p:nvSpPr>
+          <p:cNvPr id="48" name="Text 46"/>
+          <p:cNvSpPr txBox="1"/>
+          <p:nvPr/>
+        </p:nvSpPr>
+        <p:spPr>
+          <a:xfrm>
+            <a:off x="7090682" y="1097280"/>
+            <a:ext cx="1596118" cy="685800"/>
+          </a:xfrm>
+          <a:prstGeom prst="rect">
+            <a:avLst/>
+          </a:prstGeom>
+          <a:noFill/>
+          <a:ln/>
+        </p:spPr>
+        <p:txBody>
+          <a:bodyPr wrap="square" lIns="0" tIns="0" rIns="0" bIns="0" rtlCol="0" anchor="ctr"/>
+          <a:lstStyle/>
+          <a:p>
+            <a:pPr marL="0" indent="0">
+              <a:buNone/>
+            </a:pPr>
+            <a:r>
+              <a:rPr lang="en-US" sz="850" dirty="0">
+                <a:solidFill>
+                  <a:srgbClr val="5B6B7B"/>
+                </a:solidFill>
+                <a:latin typeface="Calibri" pitchFamily="34" charset="0"/>
+                <a:ea typeface="Calibri" pitchFamily="34" charset="-122"/>
+                <a:cs typeface="Calibri" pitchFamily="34" charset="-120"/>
+              </a:rPr>
+              <a:t>Caller can be a hospital contact or a partner; the call is logged against the account.</a:t>
+            </a:r>
+            <a:endParaRPr lang="en-US" sz="850" dirty="0"/>
+          </a:p>
+        </p:txBody>
+      </p:sp>
+      <p:sp>
+        <p:nvSpPr>
+          <p:cNvPr id="49" name="Text 47"/>
+          <p:cNvSpPr txBox="1"/>
+          <p:nvPr/>
+        </p:nvSpPr>
+        <p:spPr>
+          <a:xfrm>
+            <a:off x="7090682" y="1965960"/>
+            <a:ext cx="1596118" cy="685800"/>
+          </a:xfrm>
+          <a:prstGeom prst="rect">
+            <a:avLst/>
+          </a:prstGeom>
+          <a:noFill/>
+          <a:ln/>
+        </p:spPr>
+        <p:txBody>
+          <a:bodyPr wrap="square" lIns="0" tIns="0" rIns="0" bIns="0" rtlCol="0" anchor="ctr"/>
+          <a:lstStyle/>
+          <a:p>
+            <a:pPr marL="0" indent="0">
+              <a:buNone/>
+            </a:pPr>
+            <a:r>
+              <a:rPr lang="en-US" sz="850" dirty="0">
+                <a:solidFill>
+                  <a:srgbClr val="5B6B7B"/>
+                </a:solidFill>
+                <a:latin typeface="Calibri" pitchFamily="34" charset="0"/>
+                <a:ea typeface="Calibri" pitchFamily="34" charset="-122"/>
+                <a:cs typeface="Calibri" pitchFamily="34" charset="-120"/>
+              </a:rPr>
+              <a:t>Account must be Active, otherwise only a referral is sent. Duplicate call-offs are blocked. BTS asks for patient details.</a:t>
+            </a:r>
+            <a:endParaRPr lang="en-US" sz="850" dirty="0"/>
+          </a:p>
+        </p:txBody>
+      </p:sp>
+      <p:sp>
+        <p:nvSpPr>
+          <p:cNvPr id="50" name="Text 48"/>
+          <p:cNvSpPr txBox="1"/>
+          <p:nvPr/>
+        </p:nvSpPr>
+        <p:spPr>
+          <a:xfrm>
+            <a:off x="1383164" y="3718434"/>
+            <a:ext cx="1783080" cy="685800"/>
+          </a:xfrm>
+          <a:prstGeom prst="rect">
+            <a:avLst/>
+          </a:prstGeom>
+          <a:noFill/>
+          <a:ln/>
+        </p:spPr>
+        <p:txBody>
+          <a:bodyPr wrap="square" lIns="0" tIns="0" rIns="0" bIns="0" rtlCol="0" anchor="ctr"/>
+          <a:lstStyle/>
+          <a:p>
+            <a:pPr marL="0" indent="0">
+              <a:buNone/>
+            </a:pPr>
+            <a:r>
+              <a:rPr lang="en-US" sz="850" dirty="0">
+                <a:solidFill>
+                  <a:srgbClr val="5B6B7B"/>
+                </a:solidFill>
+                <a:latin typeface="Calibri" pitchFamily="34" charset="0"/>
+                <a:ea typeface="Calibri" pitchFamily="34" charset="-122"/>
+                <a:cs typeface="Calibri" pitchFamily="34" charset="-120"/>
+              </a:rPr>
+              <a:t>Fulfilling branch comes from the service area. Caller and branch are notified. Status moves Pending to Active.</a:t>
+            </a:r>
+            <a:endParaRPr lang="en-US" sz="850" dirty="0"/>
+          </a:p>
+        </p:txBody>
+      </p:sp>
+      <p:sp>
+        <p:nvSpPr>
+          <p:cNvPr id="51" name="Text 49"/>
+          <p:cNvSpPr txBox="1"/>
+          <p:nvPr/>
+        </p:nvSpPr>
+        <p:spPr>
+          <a:xfrm>
+            <a:off x="1378131" y="2994660"/>
+            <a:ext cx="1783080" cy="685800"/>
+          </a:xfrm>
+          <a:prstGeom prst="rect">
+            <a:avLst/>
+          </a:prstGeom>
+          <a:noFill/>
+          <a:ln/>
+        </p:spPr>
+        <p:txBody>
+          <a:bodyPr wrap="square" lIns="0" tIns="0" rIns="0" bIns="0" rtlCol="0" anchor="ctr"/>
+          <a:lstStyle/>
+          <a:p>
+            <a:pPr marL="0" indent="0">
+              <a:buNone/>
+            </a:pPr>
+            <a:r>
+              <a:rPr lang="en-US" sz="850" dirty="0">
+                <a:solidFill>
+                  <a:srgbClr val="5B6B7B"/>
+                </a:solidFill>
+                <a:latin typeface="Calibri" pitchFamily="34" charset="0"/>
+                <a:ea typeface="Calibri" pitchFamily="34" charset="-122"/>
+                <a:cs typeface="Calibri" pitchFamily="34" charset="-120"/>
+              </a:rPr>
+              <a:t>Orders and work orders stay linked back to the Intake for status, billing start and reporting.</a:t>
+            </a:r>
+            <a:endParaRPr lang="en-US" sz="850" dirty="0"/>
+          </a:p>
+        </p:txBody>
+      </p:sp>
+      <p:sp>
+        <p:nvSpPr>
+          <p:cNvPr id="52" name="Text 50"/>
+          <p:cNvSpPr txBox="1"/>
+          <p:nvPr/>
+        </p:nvSpPr>
+        <p:spPr>
+          <a:xfrm>
+            <a:off x="365760" y="4828032"/>
+            <a:ext cx="5486400" cy="201168"/>
+          </a:xfrm>
+          <a:prstGeom prst="rect">
+            <a:avLst/>
+          </a:prstGeom>
+          <a:noFill/>
+          <a:ln/>
+        </p:spPr>
+        <p:txBody>
+          <a:bodyPr wrap="square" lIns="0" tIns="0" rIns="0" bIns="0" rtlCol="0" anchor="ctr"/>
+          <a:lstStyle/>
+          <a:p>
+            <a:pPr marL="0" indent="0">
+              <a:buNone/>
+            </a:pPr>
+            <a:r>
+              <a:rPr lang="en-US" sz="800" dirty="0">
+                <a:solidFill>
+                  <a:srgbClr val="5B6B7B"/>
+                </a:solidFill>
+                <a:latin typeface="Calibri" pitchFamily="34" charset="0"/>
+                <a:ea typeface="Calibri" pitchFamily="34" charset="-122"/>
+                <a:cs typeface="Calibri" pitchFamily="34" charset="-120"/>
+              </a:rPr>
+              <a:t>USME  |  Customer Experience Centre</a:t>
+            </a:r>
+            <a:endParaRPr lang="en-US" sz="800" dirty="0"/>
+          </a:p>
+        </p:txBody>
+      </p:sp>
+      <p:sp>
+        <p:nvSpPr>
+          <p:cNvPr id="53" name="Text 51"/>
+          <p:cNvSpPr txBox="1"/>
+          <p:nvPr/>
+        </p:nvSpPr>
+        <p:spPr>
+          <a:xfrm>
+            <a:off x="8321040" y="4828032"/>
+            <a:ext cx="457200" cy="201168"/>
+          </a:xfrm>
+          <a:prstGeom prst="rect">
+            <a:avLst/>
+          </a:prstGeom>
+          <a:noFill/>
+          <a:ln/>
+        </p:spPr>
+        <p:txBody>
+          <a:bodyPr wrap="square" lIns="0" tIns="0" rIns="0" bIns="0" rtlCol="0" anchor="ctr"/>
+          <a:lstStyle/>
+          <a:p>
+            <a:pPr marL="0" indent="0" algn="r">
+              <a:buNone/>
+            </a:pPr>
+            <a:r>
+              <a:rPr lang="en-US" sz="800" dirty="0">
+                <a:solidFill>
+                  <a:srgbClr val="5B6B7B"/>
+                </a:solidFill>
+                <a:latin typeface="Calibri" pitchFamily="34" charset="0"/>
+                <a:ea typeface="Calibri" pitchFamily="34" charset="-122"/>
+                <a:cs typeface="Calibri" pitchFamily="34" charset="-120"/>
+              </a:rPr>
+              <a:t>2</a:t>
+            </a:r>
+            <a:endParaRPr lang="en-US" sz="800" dirty="0"/>
+          </a:p>
+        </p:txBody>
+      </p:sp>
+      <p:sp>
+        <p:nvSpPr>
           <p:cNvPr id="11" name="Shape 9"/>
           <p:cNvSpPr/>
           <p:nvPr/>
         </p:nvSpPr>
         <p:spPr>
           <a:xfrm>
-            <a:off x="365760" y="2770632"/>
+            <a:off x="361679" y="3657600"/>
             <a:ext cx="868680" cy="813816"/>
           </a:xfrm>
           <a:prstGeom prst="roundRect">
@@ -2776,8 +4541,8 @@
         </p:nvSpPr>
         <p:spPr>
           <a:xfrm>
-            <a:off x="365760" y="2770632"/>
-            <a:ext cx="868680" cy="813816"/>
+            <a:off x="297998" y="3759654"/>
+            <a:ext cx="868680" cy="649223"/>
           </a:xfrm>
           <a:prstGeom prst="rect">
             <a:avLst/>
@@ -2809,106 +4574,19 @@
       </p:sp>
       <p:sp>
         <p:nvSpPr>
-          <p:cNvPr id="13" name="Shape 11"/>
+          <p:cNvPr id="56" name="Shape 22">
+            <a:extLst>
+              <a:ext uri="{FF2B5EF4-FFF2-40B4-BE49-F238E27FC236}">
+                <a16:creationId xmlns:a16="http://schemas.microsoft.com/office/drawing/2014/main" id="{A2659E37-5DD5-15CC-1821-E0D131BF46D8}"/>
+              </a:ext>
+            </a:extLst>
+          </p:cNvPr>
           <p:cNvSpPr/>
           <p:nvPr/>
         </p:nvSpPr>
         <p:spPr>
           <a:xfrm>
-            <a:off x="365760" y="3639312"/>
-            <a:ext cx="8412480" cy="813816"/>
-          </a:xfrm>
-          <a:prstGeom prst="roundRect">
-            <a:avLst>
-              <a:gd name="adj" fmla="val 5618"/>
-            </a:avLst>
-          </a:prstGeom>
-          <a:solidFill>
-            <a:srgbClr val="FFFFFF"/>
-          </a:solidFill>
-          <a:ln w="12700">
-            <a:solidFill>
-              <a:srgbClr val="C5D2DC"/>
-            </a:solidFill>
-            <a:prstDash val="solid"/>
-          </a:ln>
-        </p:spPr>
-      </p:sp>
-      <p:sp>
-        <p:nvSpPr>
-          <p:cNvPr id="14" name="Shape 12"/>
-          <p:cNvSpPr/>
-          <p:nvPr/>
-        </p:nvSpPr>
-        <p:spPr>
-          <a:xfrm>
-            <a:off x="365760" y="3639312"/>
-            <a:ext cx="868680" cy="813816"/>
-          </a:xfrm>
-          <a:prstGeom prst="roundRect">
-            <a:avLst>
-              <a:gd name="adj" fmla="val 5618"/>
-            </a:avLst>
-          </a:prstGeom>
-          <a:solidFill>
-            <a:srgbClr val="D98E1F"/>
-          </a:solidFill>
-          <a:ln w="12700">
-            <a:solidFill>
-              <a:srgbClr val="D98E1F"/>
-            </a:solidFill>
-            <a:prstDash val="solid"/>
-          </a:ln>
-        </p:spPr>
-      </p:sp>
-      <p:sp>
-        <p:nvSpPr>
-          <p:cNvPr id="15" name="Text 13"/>
-          <p:cNvSpPr txBox="1"/>
-          <p:nvPr/>
-        </p:nvSpPr>
-        <p:spPr>
-          <a:xfrm>
-            <a:off x="365760" y="3639312"/>
-            <a:ext cx="868680" cy="813816"/>
-          </a:xfrm>
-          <a:prstGeom prst="rect">
-            <a:avLst/>
-          </a:prstGeom>
-          <a:noFill/>
-          <a:ln/>
-        </p:spPr>
-        <p:txBody>
-          <a:bodyPr wrap="square" lIns="25400" tIns="25400" rIns="25400" bIns="25400" rtlCol="0" anchor="ctr"/>
-          <a:lstStyle/>
-          <a:p>
-            <a:pPr marL="0" indent="0" algn="ctr">
-              <a:buNone/>
-            </a:pPr>
-            <a:r>
-              <a:rPr lang="en-US" sz="1000" b="1" dirty="0">
-                <a:solidFill>
-                  <a:srgbClr val="FFFFFF"/>
-                </a:solidFill>
-                <a:latin typeface="Calibri" pitchFamily="34" charset="0"/>
-                <a:ea typeface="Calibri" pitchFamily="34" charset="-122"/>
-                <a:cs typeface="Calibri" pitchFamily="34" charset="-120"/>
-              </a:rPr>
-              <a:t>Ascent</a:t>
-            </a:r>
-            <a:endParaRPr lang="en-US" sz="1000" dirty="0"/>
-          </a:p>
-        </p:txBody>
-      </p:sp>
-      <p:sp>
-        <p:nvSpPr>
-          <p:cNvPr id="16" name="Shape 14"/>
-          <p:cNvSpPr/>
-          <p:nvPr/>
-        </p:nvSpPr>
-        <p:spPr>
-          <a:xfrm>
-            <a:off x="1417320" y="1143000"/>
+            <a:off x="4301273" y="1994426"/>
             <a:ext cx="1188720" cy="594360"/>
           </a:xfrm>
           <a:prstGeom prst="roundRect">
@@ -2929,13 +4607,88 @@
       </p:sp>
       <p:sp>
         <p:nvSpPr>
-          <p:cNvPr id="17" name="Shape 15"/>
+          <p:cNvPr id="58" name="Text 25">
+            <a:extLst>
+              <a:ext uri="{FF2B5EF4-FFF2-40B4-BE49-F238E27FC236}">
+                <a16:creationId xmlns:a16="http://schemas.microsoft.com/office/drawing/2014/main" id="{CBCE4783-97BD-DD83-BADD-DADCD2CA2318}"/>
+              </a:ext>
+            </a:extLst>
+          </p:cNvPr>
+          <p:cNvSpPr txBox="1"/>
+          <p:nvPr/>
+        </p:nvSpPr>
+        <p:spPr>
+          <a:xfrm>
+            <a:off x="4346993" y="1994426"/>
+            <a:ext cx="1097280" cy="594360"/>
+          </a:xfrm>
+          <a:prstGeom prst="rect">
+            <a:avLst/>
+          </a:prstGeom>
+          <a:noFill/>
+          <a:ln/>
+        </p:spPr>
+        <p:txBody>
+          <a:bodyPr wrap="square" lIns="0" tIns="0" rIns="0" bIns="0" rtlCol="0" anchor="ctr"/>
+          <a:lstStyle/>
+          <a:p>
+            <a:pPr marL="0" indent="0" algn="ctr">
+              <a:buNone/>
+            </a:pPr>
+            <a:r>
+              <a:rPr lang="en-US" sz="900" dirty="0">
+                <a:solidFill>
+                  <a:srgbClr val="1F2A37"/>
+                </a:solidFill>
+                <a:latin typeface="Calibri" pitchFamily="34" charset="0"/>
+                <a:ea typeface="Calibri" pitchFamily="34" charset="-122"/>
+                <a:cs typeface="Calibri" pitchFamily="34" charset="-120"/>
+              </a:rPr>
+              <a:t>Confirm Intake to Order</a:t>
+            </a:r>
+            <a:endParaRPr lang="en-US" sz="900" dirty="0"/>
+          </a:p>
+        </p:txBody>
+      </p:sp>
+      <p:sp>
+        <p:nvSpPr>
+          <p:cNvPr id="60" name="Shape 33">
+            <a:extLst>
+              <a:ext uri="{FF2B5EF4-FFF2-40B4-BE49-F238E27FC236}">
+                <a16:creationId xmlns:a16="http://schemas.microsoft.com/office/drawing/2014/main" id="{AB33D0D4-B9DE-8C30-DCF9-3C24400CB797}"/>
+              </a:ext>
+            </a:extLst>
+          </p:cNvPr>
           <p:cNvSpPr/>
           <p:nvPr/>
         </p:nvSpPr>
         <p:spPr>
           <a:xfrm>
-            <a:off x="1344168" y="1069848"/>
+            <a:off x="4041648" y="2308860"/>
+            <a:ext cx="228600" cy="0"/>
+          </a:xfrm>
+          <a:prstGeom prst="line">
+            <a:avLst/>
+          </a:prstGeom>
+          <a:noFill/>
+          <a:ln w="19050">
+            <a:solidFill>
+              <a:srgbClr val="0E7C86"/>
+            </a:solidFill>
+            <a:prstDash val="solid"/>
+            <a:tailEnd type="triangle"/>
+          </a:ln>
+        </p:spPr>
+      </p:sp>
+      <p:sp>
+        <p:nvSpPr>
+          <p:cNvPr id="29" name="Shape 27"/>
+          <p:cNvSpPr/>
+          <p:nvPr/>
+        </p:nvSpPr>
+        <p:spPr>
+          <a:xfrm>
+            <a:off x="4184550" y="1952590"/>
             <a:ext cx="219456" cy="219456"/>
           </a:xfrm>
           <a:prstGeom prst="ellipse">
@@ -2954,14 +4707,14 @@
       </p:sp>
       <p:sp>
         <p:nvSpPr>
-          <p:cNvPr id="18" name="Text 16"/>
+          <p:cNvPr id="30" name="Text 28"/>
           <p:cNvSpPr txBox="1"/>
           <p:nvPr/>
         </p:nvSpPr>
         <p:spPr>
           <a:xfrm>
-            <a:off x="1344168" y="1069848"/>
-            <a:ext cx="219456" cy="219456"/>
+            <a:off x="4229750" y="2011680"/>
+            <a:ext cx="135119" cy="91400"/>
           </a:xfrm>
           <a:prstGeom prst="rect">
             <a:avLst/>
@@ -2985,87 +4738,118 @@
                 <a:ea typeface="Calibri" pitchFamily="34" charset="-122"/>
                 <a:cs typeface="Calibri" pitchFamily="34" charset="-120"/>
               </a:rPr>
-              <a:t>1</a:t>
+              <a:t>4</a:t>
             </a:r>
             <a:endParaRPr lang="en-US" sz="800" dirty="0"/>
           </a:p>
         </p:txBody>
       </p:sp>
-      <p:sp>
-        <p:nvSpPr>
-          <p:cNvPr id="19" name="Text 17"/>
-          <p:cNvSpPr txBox="1"/>
-          <p:nvPr/>
-        </p:nvSpPr>
-        <p:spPr>
-          <a:xfrm>
-            <a:off x="1463040" y="1143000"/>
-            <a:ext cx="1097280" cy="594360"/>
-          </a:xfrm>
-          <a:prstGeom prst="rect">
-            <a:avLst/>
-          </a:prstGeom>
-          <a:noFill/>
-          <a:ln/>
-        </p:spPr>
-        <p:txBody>
-          <a:bodyPr wrap="square" lIns="0" tIns="0" rIns="0" bIns="0" rtlCol="0" anchor="ctr"/>
-          <a:lstStyle/>
-          <a:p>
-            <a:pPr marL="0" indent="0" algn="ctr">
-              <a:buNone/>
-            </a:pPr>
-            <a:r>
-              <a:rPr lang="en-US" sz="900" dirty="0">
-                <a:solidFill>
-                  <a:srgbClr val="1F2A37"/>
-                </a:solidFill>
-                <a:latin typeface="Calibri" pitchFamily="34" charset="0"/>
-                <a:ea typeface="Calibri" pitchFamily="34" charset="-122"/>
-                <a:cs typeface="Calibri" pitchFamily="34" charset="-120"/>
-              </a:rPr>
-              <a:t>Customer phones the CEC to request equipment</a:t>
-            </a:r>
-            <a:endParaRPr lang="en-US" sz="900" dirty="0"/>
-          </a:p>
-        </p:txBody>
-      </p:sp>
-      <p:sp>
-        <p:nvSpPr>
-          <p:cNvPr id="20" name="Shape 18"/>
-          <p:cNvSpPr/>
-          <p:nvPr/>
-        </p:nvSpPr>
-        <p:spPr>
-          <a:xfrm>
-            <a:off x="1417320" y="2011680"/>
-            <a:ext cx="1188720" cy="594360"/>
-          </a:xfrm>
-          <a:prstGeom prst="roundRect">
-            <a:avLst>
-              <a:gd name="adj" fmla="val 12308"/>
-            </a:avLst>
-          </a:prstGeom>
-          <a:solidFill>
-            <a:srgbClr val="FFFFFF"/>
-          </a:solidFill>
+      <p:cxnSp>
+        <p:nvCxnSpPr>
+          <p:cNvPr id="68" name="Connector: Elbow 67">
+            <a:extLst>
+              <a:ext uri="{FF2B5EF4-FFF2-40B4-BE49-F238E27FC236}">
+                <a16:creationId xmlns:a16="http://schemas.microsoft.com/office/drawing/2014/main" id="{BBF58180-5FED-D086-9D4E-7945D87B9923}"/>
+              </a:ext>
+            </a:extLst>
+          </p:cNvPr>
+          <p:cNvCxnSpPr>
+            <a:endCxn id="31" idx="3"/>
+          </p:cNvCxnSpPr>
+          <p:nvPr/>
+        </p:nvCxnSpPr>
+        <p:spPr>
+          <a:xfrm rot="5400000">
+            <a:off x="6586345" y="3620023"/>
+            <a:ext cx="567091" cy="543294"/>
+          </a:xfrm>
+          <a:prstGeom prst="bentConnector2">
+            <a:avLst/>
+          </a:prstGeom>
           <a:ln w="12700">
             <a:solidFill>
-              <a:srgbClr val="0E7C86"/>
+              <a:schemeClr val="accent2"/>
             </a:solidFill>
-            <a:prstDash val="solid"/>
+            <a:tailEnd type="triangle"/>
           </a:ln>
         </p:spPr>
-      </p:sp>
-      <p:sp>
-        <p:nvSpPr>
-          <p:cNvPr id="21" name="Shape 19"/>
+        <p:style>
+          <a:lnRef idx="1">
+            <a:schemeClr val="accent1"/>
+          </a:lnRef>
+          <a:fillRef idx="0">
+            <a:schemeClr val="accent1"/>
+          </a:fillRef>
+          <a:effectRef idx="0">
+            <a:schemeClr val="accent1"/>
+          </a:effectRef>
+          <a:fontRef idx="minor">
+            <a:schemeClr val="tx1"/>
+          </a:fontRef>
+        </p:style>
+      </p:cxnSp>
+      <p:cxnSp>
+        <p:nvCxnSpPr>
+          <p:cNvPr id="69" name="Connector: Elbow 68">
+            <a:extLst>
+              <a:ext uri="{FF2B5EF4-FFF2-40B4-BE49-F238E27FC236}">
+                <a16:creationId xmlns:a16="http://schemas.microsoft.com/office/drawing/2014/main" id="{000878A4-46F0-6DEA-2F14-D20DE319FD92}"/>
+              </a:ext>
+            </a:extLst>
+          </p:cNvPr>
+          <p:cNvCxnSpPr>
+            <a:cxnSpLocks/>
+            <a:endCxn id="28" idx="1"/>
+          </p:cNvCxnSpPr>
+          <p:nvPr/>
+        </p:nvCxnSpPr>
+        <p:spPr>
+          <a:xfrm>
+            <a:off x="4598677" y="3608125"/>
+            <a:ext cx="810846" cy="516636"/>
+          </a:xfrm>
+          <a:prstGeom prst="bentConnector3">
+            <a:avLst>
+              <a:gd name="adj1" fmla="val 1374"/>
+            </a:avLst>
+          </a:prstGeom>
+          <a:ln w="12700">
+            <a:solidFill>
+              <a:schemeClr val="accent2"/>
+            </a:solidFill>
+            <a:tailEnd type="triangle"/>
+          </a:ln>
+        </p:spPr>
+        <p:style>
+          <a:lnRef idx="1">
+            <a:schemeClr val="accent1"/>
+          </a:lnRef>
+          <a:fillRef idx="0">
+            <a:schemeClr val="accent1"/>
+          </a:fillRef>
+          <a:effectRef idx="0">
+            <a:schemeClr val="accent1"/>
+          </a:effectRef>
+          <a:fontRef idx="minor">
+            <a:schemeClr val="tx1"/>
+          </a:fontRef>
+        </p:style>
+      </p:cxnSp>
+      <p:sp>
+        <p:nvSpPr>
+          <p:cNvPr id="81" name="Shape 27">
+            <a:extLst>
+              <a:ext uri="{FF2B5EF4-FFF2-40B4-BE49-F238E27FC236}">
+                <a16:creationId xmlns:a16="http://schemas.microsoft.com/office/drawing/2014/main" id="{E7AFA4E7-0F04-2704-3227-0D669F66A96C}"/>
+              </a:ext>
+            </a:extLst>
+          </p:cNvPr>
           <p:cNvSpPr/>
           <p:nvPr/>
         </p:nvSpPr>
         <p:spPr>
           <a:xfrm>
-            <a:off x="1344168" y="1938528"/>
+            <a:off x="5713764" y="3244200"/>
             <a:ext cx="219456" cy="219456"/>
           </a:xfrm>
           <a:prstGeom prst="ellipse">
@@ -3084,14 +4868,20 @@
       </p:sp>
       <p:sp>
         <p:nvSpPr>
-          <p:cNvPr id="22" name="Text 20"/>
+          <p:cNvPr id="83" name="Text 28">
+            <a:extLst>
+              <a:ext uri="{FF2B5EF4-FFF2-40B4-BE49-F238E27FC236}">
+                <a16:creationId xmlns:a16="http://schemas.microsoft.com/office/drawing/2014/main" id="{B2EDA233-39CE-8B45-02E9-DFD685770BBF}"/>
+              </a:ext>
+            </a:extLst>
+          </p:cNvPr>
           <p:cNvSpPr txBox="1"/>
           <p:nvPr/>
         </p:nvSpPr>
         <p:spPr>
           <a:xfrm>
-            <a:off x="1344168" y="1938528"/>
-            <a:ext cx="219456" cy="219456"/>
+            <a:off x="5758964" y="3303290"/>
+            <a:ext cx="135119" cy="91400"/>
           </a:xfrm>
           <a:prstGeom prst="rect">
             <a:avLst/>
@@ -3115,7 +4905,7 @@
                 <a:ea typeface="Calibri" pitchFamily="34" charset="-122"/>
                 <a:cs typeface="Calibri" pitchFamily="34" charset="-120"/>
               </a:rPr>
-              <a:t>2</a:t>
+              <a:t>5</a:t>
             </a:r>
             <a:endParaRPr lang="en-US" sz="800" dirty="0"/>
           </a:p>
@@ -3123,79 +4913,19 @@
       </p:sp>
       <p:sp>
         <p:nvSpPr>
-          <p:cNvPr id="23" name="Text 21"/>
-          <p:cNvSpPr txBox="1"/>
-          <p:nvPr/>
-        </p:nvSpPr>
-        <p:spPr>
-          <a:xfrm>
-            <a:off x="1463040" y="2011680"/>
-            <a:ext cx="1097280" cy="594360"/>
-          </a:xfrm>
-          <a:prstGeom prst="rect">
-            <a:avLst/>
-          </a:prstGeom>
-          <a:noFill/>
-          <a:ln/>
-        </p:spPr>
-        <p:txBody>
-          <a:bodyPr wrap="square" lIns="0" tIns="0" rIns="0" bIns="0" rtlCol="0" anchor="ctr"/>
-          <a:lstStyle/>
-          <a:p>
-            <a:pPr marL="0" indent="0" algn="ctr">
-              <a:buNone/>
-            </a:pPr>
-            <a:r>
-              <a:rPr lang="en-US" sz="900" dirty="0">
-                <a:solidFill>
-                  <a:srgbClr val="1F2A37"/>
-                </a:solidFill>
-                <a:latin typeface="Calibri" pitchFamily="34" charset="0"/>
-                <a:ea typeface="Calibri" pitchFamily="34" charset="-122"/>
-                <a:cs typeface="Calibri" pitchFamily="34" charset="-120"/>
-              </a:rPr>
-              <a:t>Log in to Salesforce, find the account</a:t>
-            </a:r>
-            <a:endParaRPr lang="en-US" sz="900" dirty="0"/>
-          </a:p>
-        </p:txBody>
-      </p:sp>
-      <p:sp>
-        <p:nvSpPr>
-          <p:cNvPr id="24" name="Shape 22"/>
+          <p:cNvPr id="85" name="Shape 27">
+            <a:extLst>
+              <a:ext uri="{FF2B5EF4-FFF2-40B4-BE49-F238E27FC236}">
+                <a16:creationId xmlns:a16="http://schemas.microsoft.com/office/drawing/2014/main" id="{24112598-531A-BD3A-8B84-0F6861F08AD8}"/>
+              </a:ext>
+            </a:extLst>
+          </p:cNvPr>
           <p:cNvSpPr/>
           <p:nvPr/>
         </p:nvSpPr>
         <p:spPr>
           <a:xfrm>
-            <a:off x="2834640" y="2011680"/>
-            <a:ext cx="1188720" cy="594360"/>
-          </a:xfrm>
-          <a:prstGeom prst="roundRect">
-            <a:avLst>
-              <a:gd name="adj" fmla="val 12308"/>
-            </a:avLst>
-          </a:prstGeom>
-          <a:solidFill>
-            <a:srgbClr val="FFFFFF"/>
-          </a:solidFill>
-          <a:ln w="12700">
-            <a:solidFill>
-              <a:srgbClr val="0E7C86"/>
-            </a:solidFill>
-            <a:prstDash val="solid"/>
-          </a:ln>
-        </p:spPr>
-      </p:sp>
-      <p:sp>
-        <p:nvSpPr>
-          <p:cNvPr id="25" name="Shape 23"/>
-          <p:cNvSpPr/>
-          <p:nvPr/>
-        </p:nvSpPr>
-        <p:spPr>
-          <a:xfrm>
-            <a:off x="2761488" y="1938528"/>
+            <a:off x="5295615" y="3786174"/>
             <a:ext cx="219456" cy="219456"/>
           </a:xfrm>
           <a:prstGeom prst="ellipse">
@@ -3214,14 +4944,20 @@
       </p:sp>
       <p:sp>
         <p:nvSpPr>
-          <p:cNvPr id="26" name="Text 24"/>
+          <p:cNvPr id="87" name="Text 28">
+            <a:extLst>
+              <a:ext uri="{FF2B5EF4-FFF2-40B4-BE49-F238E27FC236}">
+                <a16:creationId xmlns:a16="http://schemas.microsoft.com/office/drawing/2014/main" id="{7635E641-2934-449C-EF7A-D19D1EC0C3B3}"/>
+              </a:ext>
+            </a:extLst>
+          </p:cNvPr>
           <p:cNvSpPr txBox="1"/>
           <p:nvPr/>
         </p:nvSpPr>
         <p:spPr>
           <a:xfrm>
-            <a:off x="2761488" y="1938528"/>
-            <a:ext cx="219456" cy="219456"/>
+            <a:off x="5340815" y="3845264"/>
+            <a:ext cx="135119" cy="91400"/>
           </a:xfrm>
           <a:prstGeom prst="rect">
             <a:avLst/>
@@ -3245,874 +4981,7 @@
                 <a:ea typeface="Calibri" pitchFamily="34" charset="-122"/>
                 <a:cs typeface="Calibri" pitchFamily="34" charset="-120"/>
               </a:rPr>
-              <a:t>3</a:t>
-            </a:r>
-            <a:endParaRPr lang="en-US" sz="800" dirty="0"/>
-          </a:p>
-        </p:txBody>
-      </p:sp>
-      <p:sp>
-        <p:nvSpPr>
-          <p:cNvPr id="27" name="Text 25"/>
-          <p:cNvSpPr txBox="1"/>
-          <p:nvPr/>
-        </p:nvSpPr>
-        <p:spPr>
-          <a:xfrm>
-            <a:off x="2880360" y="2011680"/>
-            <a:ext cx="1097280" cy="594360"/>
-          </a:xfrm>
-          <a:prstGeom prst="rect">
-            <a:avLst/>
-          </a:prstGeom>
-          <a:noFill/>
-          <a:ln/>
-        </p:spPr>
-        <p:txBody>
-          <a:bodyPr wrap="square" lIns="0" tIns="0" rIns="0" bIns="0" rtlCol="0" anchor="ctr"/>
-          <a:lstStyle/>
-          <a:p>
-            <a:pPr marL="0" indent="0" algn="ctr">
-              <a:buNone/>
-            </a:pPr>
-            <a:r>
-              <a:rPr lang="en-US" sz="900" dirty="0">
-                <a:solidFill>
-                  <a:srgbClr val="1F2A37"/>
-                </a:solidFill>
-                <a:latin typeface="Calibri" pitchFamily="34" charset="0"/>
-                <a:ea typeface="Calibri" pitchFamily="34" charset="-122"/>
-                <a:cs typeface="Calibri" pitchFamily="34" charset="-120"/>
-              </a:rPr>
-              <a:t>Create the Intake with caller, items and dates</a:t>
-            </a:r>
-            <a:endParaRPr lang="en-US" sz="900" dirty="0"/>
-          </a:p>
-        </p:txBody>
-      </p:sp>
-      <p:sp>
-        <p:nvSpPr>
-          <p:cNvPr id="28" name="Shape 26"/>
-          <p:cNvSpPr/>
-          <p:nvPr/>
-        </p:nvSpPr>
-        <p:spPr>
-          <a:xfrm>
-            <a:off x="2834640" y="2880360"/>
-            <a:ext cx="1188720" cy="594360"/>
-          </a:xfrm>
-          <a:prstGeom prst="roundRect">
-            <a:avLst>
-              <a:gd name="adj" fmla="val 12308"/>
-            </a:avLst>
-          </a:prstGeom>
-          <a:solidFill>
-            <a:srgbClr val="FFFFFF"/>
-          </a:solidFill>
-          <a:ln w="12700">
-            <a:solidFill>
-              <a:srgbClr val="0E7C86"/>
-            </a:solidFill>
-            <a:prstDash val="solid"/>
-          </a:ln>
-        </p:spPr>
-      </p:sp>
-      <p:sp>
-        <p:nvSpPr>
-          <p:cNvPr id="29" name="Shape 27"/>
-          <p:cNvSpPr/>
-          <p:nvPr/>
-        </p:nvSpPr>
-        <p:spPr>
-          <a:xfrm>
-            <a:off x="2761488" y="2807208"/>
-            <a:ext cx="219456" cy="219456"/>
-          </a:xfrm>
-          <a:prstGeom prst="ellipse">
-            <a:avLst/>
-          </a:prstGeom>
-          <a:solidFill>
-            <a:srgbClr val="0E7C86"/>
-          </a:solidFill>
-          <a:ln w="12700">
-            <a:solidFill>
-              <a:srgbClr val="FFFFFF"/>
-            </a:solidFill>
-            <a:prstDash val="solid"/>
-          </a:ln>
-        </p:spPr>
-      </p:sp>
-      <p:sp>
-        <p:nvSpPr>
-          <p:cNvPr id="30" name="Text 28"/>
-          <p:cNvSpPr txBox="1"/>
-          <p:nvPr/>
-        </p:nvSpPr>
-        <p:spPr>
-          <a:xfrm>
-            <a:off x="2761488" y="2807208"/>
-            <a:ext cx="219456" cy="219456"/>
-          </a:xfrm>
-          <a:prstGeom prst="rect">
-            <a:avLst/>
-          </a:prstGeom>
-          <a:noFill/>
-          <a:ln/>
-        </p:spPr>
-        <p:txBody>
-          <a:bodyPr wrap="square" lIns="0" tIns="0" rIns="0" bIns="0" rtlCol="0" anchor="ctr"/>
-          <a:lstStyle/>
-          <a:p>
-            <a:pPr marL="0" indent="0" algn="ctr">
-              <a:buNone/>
-            </a:pPr>
-            <a:r>
-              <a:rPr lang="en-US" sz="800" b="1" dirty="0">
-                <a:solidFill>
-                  <a:srgbClr val="FFFFFF"/>
-                </a:solidFill>
-                <a:latin typeface="Calibri" pitchFamily="34" charset="0"/>
-                <a:ea typeface="Calibri" pitchFamily="34" charset="-122"/>
-                <a:cs typeface="Calibri" pitchFamily="34" charset="-120"/>
-              </a:rPr>
-              <a:t>4</a:t>
-            </a:r>
-            <a:endParaRPr lang="en-US" sz="800" dirty="0"/>
-          </a:p>
-        </p:txBody>
-      </p:sp>
-      <p:sp>
-        <p:nvSpPr>
-          <p:cNvPr id="31" name="Text 29"/>
-          <p:cNvSpPr txBox="1"/>
-          <p:nvPr/>
-        </p:nvSpPr>
-        <p:spPr>
-          <a:xfrm>
-            <a:off x="2880360" y="2880360"/>
-            <a:ext cx="1097280" cy="594360"/>
-          </a:xfrm>
-          <a:prstGeom prst="rect">
-            <a:avLst/>
-          </a:prstGeom>
-          <a:noFill/>
-          <a:ln/>
-        </p:spPr>
-        <p:txBody>
-          <a:bodyPr wrap="square" lIns="0" tIns="0" rIns="0" bIns="0" rtlCol="0" anchor="ctr"/>
-          <a:lstStyle/>
-          <a:p>
-            <a:pPr marL="0" indent="0" algn="ctr">
-              <a:buNone/>
-            </a:pPr>
-            <a:r>
-              <a:rPr lang="en-US" sz="900" dirty="0">
-                <a:solidFill>
-                  <a:srgbClr val="1F2A37"/>
-                </a:solidFill>
-                <a:latin typeface="Calibri" pitchFamily="34" charset="0"/>
-                <a:ea typeface="Calibri" pitchFamily="34" charset="-122"/>
-                <a:cs typeface="Calibri" pitchFamily="34" charset="-120"/>
-              </a:rPr>
-              <a:t>Branch set from service area, CSR assigned</a:t>
-            </a:r>
-            <a:endParaRPr lang="en-US" sz="900" dirty="0"/>
-          </a:p>
-        </p:txBody>
-      </p:sp>
-      <p:sp>
-        <p:nvSpPr>
-          <p:cNvPr id="32" name="Shape 30"/>
-          <p:cNvSpPr/>
-          <p:nvPr/>
-        </p:nvSpPr>
-        <p:spPr>
-          <a:xfrm>
-            <a:off x="4343400" y="2811780"/>
-            <a:ext cx="1280160" cy="731520"/>
-          </a:xfrm>
-          <a:prstGeom prst="diamond">
-            <a:avLst/>
-          </a:prstGeom>
-          <a:solidFill>
-            <a:srgbClr val="FBF0DB"/>
-          </a:solidFill>
-          <a:ln w="15240">
-            <a:solidFill>
-              <a:srgbClr val="D98E1F"/>
-            </a:solidFill>
-            <a:prstDash val="solid"/>
-          </a:ln>
-        </p:spPr>
-      </p:sp>
-      <p:sp>
-        <p:nvSpPr>
-          <p:cNvPr id="33" name="Text 31"/>
-          <p:cNvSpPr txBox="1"/>
-          <p:nvPr/>
-        </p:nvSpPr>
-        <p:spPr>
-          <a:xfrm>
-            <a:off x="4480560" y="2811780"/>
-            <a:ext cx="1005840" cy="731520"/>
-          </a:xfrm>
-          <a:prstGeom prst="rect">
-            <a:avLst/>
-          </a:prstGeom>
-          <a:noFill/>
-          <a:ln/>
-        </p:spPr>
-        <p:txBody>
-          <a:bodyPr wrap="square" lIns="0" tIns="0" rIns="0" bIns="0" rtlCol="0" anchor="ctr"/>
-          <a:lstStyle/>
-          <a:p>
-            <a:pPr marL="0" indent="0" algn="ctr">
-              <a:buNone/>
-            </a:pPr>
-            <a:r>
-              <a:rPr lang="en-US" sz="850" b="1" dirty="0">
-                <a:solidFill>
-                  <a:srgbClr val="14283D"/>
-                </a:solidFill>
-                <a:latin typeface="Calibri" pitchFamily="34" charset="0"/>
-                <a:ea typeface="Calibri" pitchFamily="34" charset="-122"/>
-                <a:cs typeface="Calibri" pitchFamily="34" charset="-120"/>
-              </a:rPr>
-              <a:t>Delivery or Pickup?</a:t>
-            </a:r>
-            <a:endParaRPr lang="en-US" sz="850" dirty="0"/>
-          </a:p>
-        </p:txBody>
-      </p:sp>
-      <p:sp>
-        <p:nvSpPr>
-          <p:cNvPr id="34" name="Shape 32"/>
-          <p:cNvSpPr/>
-          <p:nvPr/>
-        </p:nvSpPr>
-        <p:spPr>
-          <a:xfrm>
-            <a:off x="2011680" y="1737360"/>
-            <a:ext cx="0" cy="274320"/>
-          </a:xfrm>
-          <a:prstGeom prst="line">
-            <a:avLst/>
-          </a:prstGeom>
-          <a:noFill/>
-          <a:ln w="19050">
-            <a:solidFill>
-              <a:srgbClr val="0E7C86"/>
-            </a:solidFill>
-            <a:prstDash val="solid"/>
-            <a:tailEnd type="triangle"/>
-          </a:ln>
-        </p:spPr>
-      </p:sp>
-      <p:sp>
-        <p:nvSpPr>
-          <p:cNvPr id="35" name="Shape 33"/>
-          <p:cNvSpPr/>
-          <p:nvPr/>
-        </p:nvSpPr>
-        <p:spPr>
-          <a:xfrm>
-            <a:off x="2606040" y="2308860"/>
-            <a:ext cx="228600" cy="0"/>
-          </a:xfrm>
-          <a:prstGeom prst="line">
-            <a:avLst/>
-          </a:prstGeom>
-          <a:noFill/>
-          <a:ln w="19050">
-            <a:solidFill>
-              <a:srgbClr val="0E7C86"/>
-            </a:solidFill>
-            <a:prstDash val="solid"/>
-            <a:tailEnd type="triangle"/>
-          </a:ln>
-        </p:spPr>
-      </p:sp>
-      <p:sp>
-        <p:nvSpPr>
-          <p:cNvPr id="36" name="Shape 34"/>
-          <p:cNvSpPr/>
-          <p:nvPr/>
-        </p:nvSpPr>
-        <p:spPr>
-          <a:xfrm>
-            <a:off x="3429000" y="2606040"/>
-            <a:ext cx="0" cy="274320"/>
-          </a:xfrm>
-          <a:prstGeom prst="line">
-            <a:avLst/>
-          </a:prstGeom>
-          <a:noFill/>
-          <a:ln w="19050">
-            <a:solidFill>
-              <a:srgbClr val="0E7C86"/>
-            </a:solidFill>
-            <a:prstDash val="solid"/>
-            <a:tailEnd type="triangle"/>
-          </a:ln>
-        </p:spPr>
-      </p:sp>
-      <p:sp>
-        <p:nvSpPr>
-          <p:cNvPr id="37" name="Shape 35"/>
-          <p:cNvSpPr/>
-          <p:nvPr/>
-        </p:nvSpPr>
-        <p:spPr>
-          <a:xfrm>
-            <a:off x="4023360" y="3177540"/>
-            <a:ext cx="320040" cy="0"/>
-          </a:xfrm>
-          <a:prstGeom prst="line">
-            <a:avLst/>
-          </a:prstGeom>
-          <a:noFill/>
-          <a:ln w="19050">
-            <a:solidFill>
-              <a:srgbClr val="0E7C86"/>
-            </a:solidFill>
-            <a:prstDash val="solid"/>
-            <a:tailEnd type="triangle"/>
-          </a:ln>
-        </p:spPr>
-      </p:sp>
-      <p:sp>
-        <p:nvSpPr>
-          <p:cNvPr id="38" name="Shape 36"/>
-          <p:cNvSpPr/>
-          <p:nvPr/>
-        </p:nvSpPr>
-        <p:spPr>
-          <a:xfrm>
-            <a:off x="4983480" y="3543300"/>
-            <a:ext cx="0" cy="41148"/>
-          </a:xfrm>
-          <a:prstGeom prst="line">
-            <a:avLst/>
-          </a:prstGeom>
-          <a:noFill/>
-          <a:ln w="19050">
-            <a:solidFill>
-              <a:srgbClr val="D98E1F"/>
-            </a:solidFill>
-            <a:prstDash val="solid"/>
-          </a:ln>
-        </p:spPr>
-      </p:sp>
-      <p:sp>
-        <p:nvSpPr>
-          <p:cNvPr id="39" name="Shape 37"/>
-          <p:cNvSpPr/>
-          <p:nvPr/>
-        </p:nvSpPr>
-        <p:spPr>
-          <a:xfrm>
-            <a:off x="3977640" y="3584448"/>
-            <a:ext cx="2011680" cy="0"/>
-          </a:xfrm>
-          <a:prstGeom prst="line">
-            <a:avLst/>
-          </a:prstGeom>
-          <a:noFill/>
-          <a:ln w="19050">
-            <a:solidFill>
-              <a:srgbClr val="D98E1F"/>
-            </a:solidFill>
-            <a:prstDash val="solid"/>
-          </a:ln>
-        </p:spPr>
-      </p:sp>
-      <p:sp>
-        <p:nvSpPr>
-          <p:cNvPr id="40" name="Shape 38"/>
-          <p:cNvSpPr/>
-          <p:nvPr/>
-        </p:nvSpPr>
-        <p:spPr>
-          <a:xfrm>
-            <a:off x="3977640" y="3584448"/>
-            <a:ext cx="0" cy="164592"/>
-          </a:xfrm>
-          <a:prstGeom prst="line">
-            <a:avLst/>
-          </a:prstGeom>
-          <a:noFill/>
-          <a:ln w="19050">
-            <a:solidFill>
-              <a:srgbClr val="D98E1F"/>
-            </a:solidFill>
-            <a:prstDash val="solid"/>
-            <a:tailEnd type="triangle"/>
-          </a:ln>
-        </p:spPr>
-      </p:sp>
-      <p:sp>
-        <p:nvSpPr>
-          <p:cNvPr id="41" name="Shape 39"/>
-          <p:cNvSpPr/>
-          <p:nvPr/>
-        </p:nvSpPr>
-        <p:spPr>
-          <a:xfrm>
-            <a:off x="5989320" y="3584448"/>
-            <a:ext cx="0" cy="164592"/>
-          </a:xfrm>
-          <a:prstGeom prst="line">
-            <a:avLst/>
-          </a:prstGeom>
-          <a:noFill/>
-          <a:ln w="19050">
-            <a:solidFill>
-              <a:srgbClr val="D98E1F"/>
-            </a:solidFill>
-            <a:prstDash val="solid"/>
-            <a:tailEnd type="triangle"/>
-          </a:ln>
-        </p:spPr>
-      </p:sp>
-      <p:sp>
-        <p:nvSpPr>
-          <p:cNvPr id="42" name="Shape 40"/>
-          <p:cNvSpPr/>
-          <p:nvPr/>
-        </p:nvSpPr>
-        <p:spPr>
-          <a:xfrm>
-            <a:off x="3108960" y="3749040"/>
-            <a:ext cx="1737360" cy="594360"/>
-          </a:xfrm>
-          <a:prstGeom prst="roundRect">
-            <a:avLst>
-              <a:gd name="adj" fmla="val 12308"/>
-            </a:avLst>
-          </a:prstGeom>
-          <a:solidFill>
-            <a:srgbClr val="FBF0DB"/>
-          </a:solidFill>
-          <a:ln w="12700">
-            <a:solidFill>
-              <a:srgbClr val="D98E1F"/>
-            </a:solidFill>
-            <a:prstDash val="solid"/>
-          </a:ln>
-        </p:spPr>
-      </p:sp>
-      <p:sp>
-        <p:nvSpPr>
-          <p:cNvPr id="43" name="Text 41"/>
-          <p:cNvSpPr txBox="1"/>
-          <p:nvPr/>
-        </p:nvSpPr>
-        <p:spPr>
-          <a:xfrm>
-            <a:off x="3154680" y="3749040"/>
-            <a:ext cx="1645920" cy="594360"/>
-          </a:xfrm>
-          <a:prstGeom prst="rect">
-            <a:avLst/>
-          </a:prstGeom>
-          <a:noFill/>
-          <a:ln/>
-        </p:spPr>
-        <p:txBody>
-          <a:bodyPr wrap="square" lIns="0" tIns="0" rIns="0" bIns="0" rtlCol="0" anchor="ctr"/>
-          <a:lstStyle/>
-          <a:p>
-            <a:pPr marL="0" indent="0" algn="ctr">
-              <a:buNone/>
-            </a:pPr>
-            <a:r>
-              <a:rPr lang="en-US" sz="900" dirty="0">
-                <a:solidFill>
-                  <a:srgbClr val="1F2A37"/>
-                </a:solidFill>
-                <a:latin typeface="Calibri" pitchFamily="34" charset="0"/>
-                <a:ea typeface="Calibri" pitchFamily="34" charset="-122"/>
-                <a:cs typeface="Calibri" pitchFamily="34" charset="-120"/>
-              </a:rPr>
-              <a:t>Delivery: Sales Order and Lines created once delivery is completed</a:t>
-            </a:r>
-            <a:endParaRPr lang="en-US" sz="900" dirty="0"/>
-          </a:p>
-        </p:txBody>
-      </p:sp>
-      <p:sp>
-        <p:nvSpPr>
-          <p:cNvPr id="44" name="Shape 42"/>
-          <p:cNvSpPr/>
-          <p:nvPr/>
-        </p:nvSpPr>
-        <p:spPr>
-          <a:xfrm>
-            <a:off x="5120640" y="3749040"/>
-            <a:ext cx="1737360" cy="594360"/>
-          </a:xfrm>
-          <a:prstGeom prst="roundRect">
-            <a:avLst>
-              <a:gd name="adj" fmla="val 12308"/>
-            </a:avLst>
-          </a:prstGeom>
-          <a:solidFill>
-            <a:srgbClr val="FBF0DB"/>
-          </a:solidFill>
-          <a:ln w="12700">
-            <a:solidFill>
-              <a:srgbClr val="D98E1F"/>
-            </a:solidFill>
-            <a:prstDash val="solid"/>
-          </a:ln>
-        </p:spPr>
-      </p:sp>
-      <p:sp>
-        <p:nvSpPr>
-          <p:cNvPr id="45" name="Text 43"/>
-          <p:cNvSpPr txBox="1"/>
-          <p:nvPr/>
-        </p:nvSpPr>
-        <p:spPr>
-          <a:xfrm>
-            <a:off x="5166360" y="3749040"/>
-            <a:ext cx="1645920" cy="594360"/>
-          </a:xfrm>
-          <a:prstGeom prst="rect">
-            <a:avLst/>
-          </a:prstGeom>
-          <a:noFill/>
-          <a:ln/>
-        </p:spPr>
-        <p:txBody>
-          <a:bodyPr wrap="square" lIns="0" tIns="0" rIns="0" bIns="0" rtlCol="0" anchor="ctr"/>
-          <a:lstStyle/>
-          <a:p>
-            <a:pPr marL="0" indent="0" algn="ctr">
-              <a:buNone/>
-            </a:pPr>
-            <a:r>
-              <a:rPr lang="en-US" sz="900" dirty="0">
-                <a:solidFill>
-                  <a:srgbClr val="1F2A37"/>
-                </a:solidFill>
-                <a:latin typeface="Calibri" pitchFamily="34" charset="0"/>
-                <a:ea typeface="Calibri" pitchFamily="34" charset="-122"/>
-                <a:cs typeface="Calibri" pitchFamily="34" charset="-120"/>
-              </a:rPr>
-              <a:t>Pickup: Work Order and Lines created, active at once</a:t>
-            </a:r>
-            <a:endParaRPr lang="en-US" sz="900" dirty="0"/>
-          </a:p>
-        </p:txBody>
-      </p:sp>
-      <p:sp>
-        <p:nvSpPr>
-          <p:cNvPr id="46" name="Text 44"/>
-          <p:cNvSpPr txBox="1"/>
-          <p:nvPr/>
-        </p:nvSpPr>
-        <p:spPr>
-          <a:xfrm>
-            <a:off x="4041648" y="3593592"/>
-            <a:ext cx="548640" cy="164592"/>
-          </a:xfrm>
-          <a:prstGeom prst="rect">
-            <a:avLst/>
-          </a:prstGeom>
-          <a:noFill/>
-          <a:ln/>
-        </p:spPr>
-        <p:txBody>
-          <a:bodyPr wrap="square" lIns="0" tIns="0" rIns="0" bIns="0" rtlCol="0" anchor="ctr"/>
-          <a:lstStyle/>
-          <a:p>
-            <a:pPr marL="0" indent="0">
-              <a:buNone/>
-            </a:pPr>
-            <a:r>
-              <a:rPr lang="en-US" sz="800" b="1" dirty="0">
-                <a:solidFill>
-                  <a:srgbClr val="D98E1F"/>
-                </a:solidFill>
-                <a:latin typeface="Calibri" pitchFamily="34" charset="0"/>
-                <a:ea typeface="Calibri" pitchFamily="34" charset="-122"/>
-                <a:cs typeface="Calibri" pitchFamily="34" charset="-120"/>
-              </a:rPr>
-              <a:t>Delivery</a:t>
-            </a:r>
-            <a:endParaRPr lang="en-US" sz="800" dirty="0"/>
-          </a:p>
-        </p:txBody>
-      </p:sp>
-      <p:sp>
-        <p:nvSpPr>
-          <p:cNvPr id="47" name="Text 45"/>
-          <p:cNvSpPr txBox="1"/>
-          <p:nvPr/>
-        </p:nvSpPr>
-        <p:spPr>
-          <a:xfrm>
-            <a:off x="6053328" y="3593592"/>
-            <a:ext cx="548640" cy="164592"/>
-          </a:xfrm>
-          <a:prstGeom prst="rect">
-            <a:avLst/>
-          </a:prstGeom>
-          <a:noFill/>
-          <a:ln/>
-        </p:spPr>
-        <p:txBody>
-          <a:bodyPr wrap="square" lIns="0" tIns="0" rIns="0" bIns="0" rtlCol="0" anchor="ctr"/>
-          <a:lstStyle/>
-          <a:p>
-            <a:pPr marL="0" indent="0">
-              <a:buNone/>
-            </a:pPr>
-            <a:r>
-              <a:rPr lang="en-US" sz="800" b="1" dirty="0">
-                <a:solidFill>
-                  <a:srgbClr val="D98E1F"/>
-                </a:solidFill>
-                <a:latin typeface="Calibri" pitchFamily="34" charset="0"/>
-                <a:ea typeface="Calibri" pitchFamily="34" charset="-122"/>
-                <a:cs typeface="Calibri" pitchFamily="34" charset="-120"/>
-              </a:rPr>
-              <a:t>Pickup</a:t>
-            </a:r>
-            <a:endParaRPr lang="en-US" sz="800" dirty="0"/>
-          </a:p>
-        </p:txBody>
-      </p:sp>
-      <p:sp>
-        <p:nvSpPr>
-          <p:cNvPr id="48" name="Text 46"/>
-          <p:cNvSpPr txBox="1"/>
-          <p:nvPr/>
-        </p:nvSpPr>
-        <p:spPr>
-          <a:xfrm>
-            <a:off x="6903720" y="1097280"/>
-            <a:ext cx="1783080" cy="685800"/>
-          </a:xfrm>
-          <a:prstGeom prst="rect">
-            <a:avLst/>
-          </a:prstGeom>
-          <a:noFill/>
-          <a:ln/>
-        </p:spPr>
-        <p:txBody>
-          <a:bodyPr wrap="square" lIns="0" tIns="0" rIns="0" bIns="0" rtlCol="0" anchor="ctr"/>
-          <a:lstStyle/>
-          <a:p>
-            <a:pPr marL="0" indent="0">
-              <a:buNone/>
-            </a:pPr>
-            <a:r>
-              <a:rPr lang="en-US" sz="850" dirty="0">
-                <a:solidFill>
-                  <a:srgbClr val="5B6B7B"/>
-                </a:solidFill>
-                <a:latin typeface="Calibri" pitchFamily="34" charset="0"/>
-                <a:ea typeface="Calibri" pitchFamily="34" charset="-122"/>
-                <a:cs typeface="Calibri" pitchFamily="34" charset="-120"/>
-              </a:rPr>
-              <a:t>Caller can be a hospital contact or a partner; the call is logged against the account.</a:t>
-            </a:r>
-            <a:endParaRPr lang="en-US" sz="850" dirty="0"/>
-          </a:p>
-        </p:txBody>
-      </p:sp>
-      <p:sp>
-        <p:nvSpPr>
-          <p:cNvPr id="49" name="Text 47"/>
-          <p:cNvSpPr txBox="1"/>
-          <p:nvPr/>
-        </p:nvSpPr>
-        <p:spPr>
-          <a:xfrm>
-            <a:off x="6903720" y="1965960"/>
-            <a:ext cx="1783080" cy="685800"/>
-          </a:xfrm>
-          <a:prstGeom prst="rect">
-            <a:avLst/>
-          </a:prstGeom>
-          <a:noFill/>
-          <a:ln/>
-        </p:spPr>
-        <p:txBody>
-          <a:bodyPr wrap="square" lIns="0" tIns="0" rIns="0" bIns="0" rtlCol="0" anchor="ctr"/>
-          <a:lstStyle/>
-          <a:p>
-            <a:pPr marL="0" indent="0">
-              <a:buNone/>
-            </a:pPr>
-            <a:r>
-              <a:rPr lang="en-US" sz="850" dirty="0">
-                <a:solidFill>
-                  <a:srgbClr val="5B6B7B"/>
-                </a:solidFill>
-                <a:latin typeface="Calibri" pitchFamily="34" charset="0"/>
-                <a:ea typeface="Calibri" pitchFamily="34" charset="-122"/>
-                <a:cs typeface="Calibri" pitchFamily="34" charset="-120"/>
-              </a:rPr>
-              <a:t>Account must be Active, otherwise only a referral is sent. Duplicate call-offs are blocked. BTS asks for patient details.</a:t>
-            </a:r>
-            <a:endParaRPr lang="en-US" sz="850" dirty="0"/>
-          </a:p>
-        </p:txBody>
-      </p:sp>
-      <p:sp>
-        <p:nvSpPr>
-          <p:cNvPr id="50" name="Text 48"/>
-          <p:cNvSpPr txBox="1"/>
-          <p:nvPr/>
-        </p:nvSpPr>
-        <p:spPr>
-          <a:xfrm>
-            <a:off x="6903720" y="2834640"/>
-            <a:ext cx="1783080" cy="685800"/>
-          </a:xfrm>
-          <a:prstGeom prst="rect">
-            <a:avLst/>
-          </a:prstGeom>
-          <a:noFill/>
-          <a:ln/>
-        </p:spPr>
-        <p:txBody>
-          <a:bodyPr wrap="square" lIns="0" tIns="0" rIns="0" bIns="0" rtlCol="0" anchor="ctr"/>
-          <a:lstStyle/>
-          <a:p>
-            <a:pPr marL="0" indent="0">
-              <a:buNone/>
-            </a:pPr>
-            <a:r>
-              <a:rPr lang="en-US" sz="850" dirty="0">
-                <a:solidFill>
-                  <a:srgbClr val="5B6B7B"/>
-                </a:solidFill>
-                <a:latin typeface="Calibri" pitchFamily="34" charset="0"/>
-                <a:ea typeface="Calibri" pitchFamily="34" charset="-122"/>
-                <a:cs typeface="Calibri" pitchFamily="34" charset="-120"/>
-              </a:rPr>
-              <a:t>Fulfilling branch comes from the service area. Caller and branch are notified. Status moves Pending to Active.</a:t>
-            </a:r>
-            <a:endParaRPr lang="en-US" sz="850" dirty="0"/>
-          </a:p>
-        </p:txBody>
-      </p:sp>
-      <p:sp>
-        <p:nvSpPr>
-          <p:cNvPr id="51" name="Text 49"/>
-          <p:cNvSpPr txBox="1"/>
-          <p:nvPr/>
-        </p:nvSpPr>
-        <p:spPr>
-          <a:xfrm>
-            <a:off x="6903720" y="3703320"/>
-            <a:ext cx="1783080" cy="685800"/>
-          </a:xfrm>
-          <a:prstGeom prst="rect">
-            <a:avLst/>
-          </a:prstGeom>
-          <a:noFill/>
-          <a:ln/>
-        </p:spPr>
-        <p:txBody>
-          <a:bodyPr wrap="square" lIns="0" tIns="0" rIns="0" bIns="0" rtlCol="0" anchor="ctr"/>
-          <a:lstStyle/>
-          <a:p>
-            <a:pPr marL="0" indent="0">
-              <a:buNone/>
-            </a:pPr>
-            <a:r>
-              <a:rPr lang="en-US" sz="850" dirty="0">
-                <a:solidFill>
-                  <a:srgbClr val="5B6B7B"/>
-                </a:solidFill>
-                <a:latin typeface="Calibri" pitchFamily="34" charset="0"/>
-                <a:ea typeface="Calibri" pitchFamily="34" charset="-122"/>
-                <a:cs typeface="Calibri" pitchFamily="34" charset="-120"/>
-              </a:rPr>
-              <a:t>Orders and work orders stay linked back to the Intake for status, billing start and reporting.</a:t>
-            </a:r>
-            <a:endParaRPr lang="en-US" sz="850" dirty="0"/>
-          </a:p>
-        </p:txBody>
-      </p:sp>
-      <p:sp>
-        <p:nvSpPr>
-          <p:cNvPr id="52" name="Text 50"/>
-          <p:cNvSpPr txBox="1"/>
-          <p:nvPr/>
-        </p:nvSpPr>
-        <p:spPr>
-          <a:xfrm>
-            <a:off x="365760" y="4828032"/>
-            <a:ext cx="5486400" cy="201168"/>
-          </a:xfrm>
-          <a:prstGeom prst="rect">
-            <a:avLst/>
-          </a:prstGeom>
-          <a:noFill/>
-          <a:ln/>
-        </p:spPr>
-        <p:txBody>
-          <a:bodyPr wrap="square" lIns="0" tIns="0" rIns="0" bIns="0" rtlCol="0" anchor="ctr"/>
-          <a:lstStyle/>
-          <a:p>
-            <a:pPr marL="0" indent="0">
-              <a:buNone/>
-            </a:pPr>
-            <a:r>
-              <a:rPr lang="en-US" sz="800" dirty="0">
-                <a:solidFill>
-                  <a:srgbClr val="5B6B7B"/>
-                </a:solidFill>
-                <a:latin typeface="Calibri" pitchFamily="34" charset="0"/>
-                <a:ea typeface="Calibri" pitchFamily="34" charset="-122"/>
-                <a:cs typeface="Calibri" pitchFamily="34" charset="-120"/>
-              </a:rPr>
-              <a:t>USME  |  Customer Experience Centre</a:t>
-            </a:r>
-            <a:endParaRPr lang="en-US" sz="800" dirty="0"/>
-          </a:p>
-        </p:txBody>
-      </p:sp>
-      <p:sp>
-        <p:nvSpPr>
-          <p:cNvPr id="53" name="Text 51"/>
-          <p:cNvSpPr txBox="1"/>
-          <p:nvPr/>
-        </p:nvSpPr>
-        <p:spPr>
-          <a:xfrm>
-            <a:off x="8321040" y="4828032"/>
-            <a:ext cx="457200" cy="201168"/>
-          </a:xfrm>
-          <a:prstGeom prst="rect">
-            <a:avLst/>
-          </a:prstGeom>
-          <a:noFill/>
-          <a:ln/>
-        </p:spPr>
-        <p:txBody>
-          <a:bodyPr wrap="square" lIns="0" tIns="0" rIns="0" bIns="0" rtlCol="0" anchor="ctr"/>
-          <a:lstStyle/>
-          <a:p>
-            <a:pPr marL="0" indent="0" algn="r">
-              <a:buNone/>
-            </a:pPr>
-            <a:r>
-              <a:rPr lang="en-US" sz="800" dirty="0">
-                <a:solidFill>
-                  <a:srgbClr val="5B6B7B"/>
-                </a:solidFill>
-                <a:latin typeface="Calibri" pitchFamily="34" charset="0"/>
-                <a:ea typeface="Calibri" pitchFamily="34" charset="-122"/>
-                <a:cs typeface="Calibri" pitchFamily="34" charset="-120"/>
-              </a:rPr>
-              <a:t>2</a:t>
+              <a:t>6</a:t>
             </a:r>
             <a:endParaRPr lang="en-US" sz="800" dirty="0"/>
           </a:p>
@@ -4503,7 +5372,7 @@
                 <a:ea typeface="Calibri" pitchFamily="34" charset="-122"/>
                 <a:cs typeface="Calibri" pitchFamily="34" charset="-120"/>
               </a:rPr>
-              <a:t>Delivered / Completed</a:t>
+              <a:t>Order Created</a:t>
             </a:r>
             <a:endParaRPr lang="en-US" sz="1300" dirty="0"/>
           </a:p>
@@ -4520,7 +5389,7 @@
                 <a:ea typeface="Calibri" pitchFamily="34" charset="-122"/>
                 <a:cs typeface="Calibri" pitchFamily="34" charset="-120"/>
               </a:rPr>
-              <a:t>Branch confirmed. Order created, billing starts.</a:t>
+              <a:t>Sales Order / Work Order created</a:t>
             </a:r>
             <a:endParaRPr lang="en-US" sz="1300" dirty="0"/>
           </a:p>
@@ -4976,7 +5845,7 @@
                 <a:ea typeface="Calibri" pitchFamily="34" charset="-122"/>
                 <a:cs typeface="Calibri" pitchFamily="34" charset="-120"/>
               </a:rPr>
-              <a:t>Fulfilling branch is derived from the service area; branch users assign the CSR.</a:t>
+              <a:t>Fulfilling branch is derived from the service area; branch users assign the CSR will be done on the Order</a:t>
             </a:r>
             <a:endParaRPr lang="en-US" sz="1100" dirty="0"/>
           </a:p>
